--- a/python-course-ppt/逐节课件/Python讲授课件-单元03.pptx
+++ b/python-course-ppt/逐节课件/Python讲授课件-单元03.pptx
@@ -236,1272 +236,6 @@
     </a:lvl9pPr>
   </p:notesStyle>
 </p:notesMaster>
-</file>
-
-<file path=ppt/notesSlides/notesSlide1.xml><?xml version="1.0" encoding="utf-8"?>
-<p:notes xmlns:a="http://schemas.openxmlformats.org/drawingml/2006/main" xmlns:p="http://schemas.openxmlformats.org/presentationml/2006/main" xmlns:r="http://schemas.openxmlformats.org/officeDocument/2006/relationships">
-  <p:cSld>
-    <p:spTree>
-      <p:nvGrpSpPr>
-        <p:cNvPr id="1" name=""/>
-        <p:cNvGrpSpPr/>
-        <p:nvPr/>
-      </p:nvGrpSpPr>
-      <p:grpSpPr>
-        <a:xfrm>
-          <a:off x="0" y="0"/>
-          <a:ext cx="0" cy="0"/>
-          <a:chOff x="0" y="0"/>
-          <a:chExt cx="0" cy="0"/>
-        </a:xfrm>
-      </p:grpSpPr>
-      <p:sp>
-        <p:nvSpPr>
-          <p:cNvPr id="2" name="讲课提示"/>
-          <p:cNvSpPr txBox="1"/>
-          <p:nvPr/>
-        </p:nvSpPr>
-        <p:spPr>
-          <a:xfrm>
-            <a:off x="457200" y="457200"/>
-            <a:ext cx="6858000" cy="4800600"/>
-          </a:xfrm>
-          <a:prstGeom prst="rect">
-            <a:avLst/>
-          </a:prstGeom>
-        </p:spPr>
-        <p:txBody>
-          <a:bodyPr wrap="square"/>
-          <a:lstStyle/>
-          <a:p>
-            <a:r>
-              <a:rPr lang="zh-CN" dirty="0"/>
-              <a:t>单元 3 · 单元 3 · 操作列表</a:t>
-            </a:r>
-          </a:p>
-          <a:p>
-            <a:r>
-              <a:rPr lang="zh-CN" dirty="0"/>
-              <a:t/>
-            </a:r>
-          </a:p>
-          <a:p>
-            <a:r>
-              <a:rPr lang="zh-CN" dirty="0"/>
-              <a:t>本单元包含以下课节：</a:t>
-            </a:r>
-          </a:p>
-          <a:p>
-            <a:r>
-              <a:rPr lang="zh-CN" dirty="0"/>
-              <a:t>· 第 14 节 for 循环：把重复交给机器</a:t>
-            </a:r>
-          </a:p>
-          <a:p>
-            <a:r>
-              <a:rPr lang="zh-CN" dirty="0"/>
-              <a:t>· 第 15 节 range() 与列表推导式</a:t>
-            </a:r>
-          </a:p>
-          <a:p>
-            <a:r>
-              <a:rPr lang="zh-CN" dirty="0"/>
-              <a:t>· 第 16 节 切片、元组与 PEP 8 排版</a:t>
-            </a:r>
-          </a:p>
-          <a:p>
-            <a:r>
-              <a:rPr lang="zh-CN" dirty="0"/>
-              <a:t>· 第 17 节 动手实战与答案讲评</a:t>
-            </a:r>
-          </a:p>
-          <a:p>
-            <a:r>
-              <a:rPr lang="zh-CN" dirty="0"/>
-              <a:t>· 第 18 节 单元 3 验收复盘</a:t>
-            </a:r>
-          </a:p>
-          <a:p>
-            <a:r>
-              <a:rPr lang="zh-CN" dirty="0"/>
-              <a:t/>
-            </a:r>
-          </a:p>
-          <a:p>
-            <a:r>
-              <a:rPr lang="zh-CN" dirty="0"/>
-              <a:t>开场用 3 分钟讲清：这个单元学完能做出什么，最后会被关卡怎么验。</a:t>
-            </a:r>
-          </a:p>
-        </p:txBody>
-      </p:sp>
-    </p:spTree>
-  </p:cSld>
-  <p:clrMapOvr>
-    <a:masterClrMapping/>
-  </p:clrMapOvr>
-</p:notes>
-</file>
-
-<file path=ppt/notesSlides/notesSlide10.xml><?xml version="1.0" encoding="utf-8"?>
-<p:notes xmlns:a="http://schemas.openxmlformats.org/drawingml/2006/main" xmlns:p="http://schemas.openxmlformats.org/presentationml/2006/main" xmlns:r="http://schemas.openxmlformats.org/officeDocument/2006/relationships">
-  <p:cSld>
-    <p:spTree>
-      <p:nvGrpSpPr>
-        <p:cNvPr id="1" name=""/>
-        <p:cNvGrpSpPr/>
-        <p:nvPr/>
-      </p:nvGrpSpPr>
-      <p:grpSpPr>
-        <a:xfrm>
-          <a:off x="0" y="0"/>
-          <a:ext cx="0" cy="0"/>
-          <a:chOff x="0" y="0"/>
-          <a:chExt cx="0" cy="0"/>
-        </a:xfrm>
-      </p:grpSpPr>
-      <p:sp>
-        <p:nvSpPr>
-          <p:cNvPr id="2" name="讲课提示"/>
-          <p:cNvSpPr txBox="1"/>
-          <p:nvPr/>
-        </p:nvSpPr>
-        <p:spPr>
-          <a:xfrm>
-            <a:off x="457200" y="457200"/>
-            <a:ext cx="6858000" cy="4800600"/>
-          </a:xfrm>
-          <a:prstGeom prst="rect">
-            <a:avLst/>
-          </a:prstGeom>
-        </p:spPr>
-        <p:txBody>
-          <a:bodyPr wrap="square"/>
-          <a:lstStyle/>
-          <a:p>
-            <a:r>
-              <a:rPr lang="zh-CN" dirty="0"/>
-              <a:t>第 18 节 · 单元 3 验收复盘</a:t>
-            </a:r>
-          </a:p>
-          <a:p>
-            <a:r>
-              <a:rPr lang="zh-CN" dirty="0"/>
-              <a:t>单元 3 · 操作列表 · W3</a:t>
-            </a:r>
-          </a:p>
-          <a:p>
-            <a:r>
-              <a:rPr lang="zh-CN" dirty="0"/>
-              <a:t/>
-            </a:r>
-          </a:p>
-          <a:p>
-            <a:r>
-              <a:rPr lang="zh-CN" dirty="0"/>
-              <a:t>学习目标：确认循环、range、推导式、切片、元组都过关</a:t>
-            </a:r>
-          </a:p>
-          <a:p>
-            <a:r>
-              <a:rPr lang="zh-CN" dirty="0"/>
-              <a:t/>
-            </a:r>
-          </a:p>
-          <a:p>
-            <a:r>
-              <a:rPr lang="zh-CN" dirty="0"/>
-              <a:t>课堂实操（40 分钟，不看答案）：</a:t>
-            </a:r>
-          </a:p>
-          <a:p>
-            <a:r>
-              <a:rPr lang="zh-CN" dirty="0"/>
-              <a:t>· 逐条打勾验收自测</a:t>
-            </a:r>
-          </a:p>
-          <a:p>
-            <a:r>
-              <a:rPr lang="zh-CN" dirty="0"/>
-              <a:t>· 互相考range / 切片的易错点</a:t>
-            </a:r>
-          </a:p>
-          <a:p>
-            <a:r>
-              <a:rPr lang="zh-CN" dirty="0"/>
-              <a:t/>
-            </a:r>
-          </a:p>
-          <a:p>
-            <a:r>
-              <a:rPr lang="zh-CN" dirty="0"/>
-              <a:t>课后作业：</a:t>
-            </a:r>
-          </a:p>
-          <a:p>
-            <a:r>
-              <a:rPr lang="zh-CN" dirty="0"/>
-              <a:t>· 完成本单元小结与产出检查</a:t>
-            </a:r>
-          </a:p>
-          <a:p>
-            <a:r>
-              <a:rPr lang="zh-CN" dirty="0"/>
-              <a:t/>
-            </a:r>
-          </a:p>
-          <a:p>
-            <a:r>
-              <a:rPr lang="zh-CN" dirty="0"/>
-              <a:t>节奏：讲 20 分钟 → 学员自己敲 40 分钟（不看答案）→ 对讲评自查 20 分钟 → 写作业 10 分钟。</a:t>
-            </a:r>
-          </a:p>
-        </p:txBody>
-      </p:sp>
-    </p:spTree>
-  </p:cSld>
-  <p:clrMapOvr>
-    <a:masterClrMapping/>
-  </p:clrMapOvr>
-</p:notes>
-</file>
-
-<file path=ppt/notesSlides/notesSlide11.xml><?xml version="1.0" encoding="utf-8"?>
-<p:notes xmlns:a="http://schemas.openxmlformats.org/drawingml/2006/main" xmlns:p="http://schemas.openxmlformats.org/presentationml/2006/main" xmlns:r="http://schemas.openxmlformats.org/officeDocument/2006/relationships">
-  <p:cSld>
-    <p:spTree>
-      <p:nvGrpSpPr>
-        <p:cNvPr id="1" name=""/>
-        <p:cNvGrpSpPr/>
-        <p:nvPr/>
-      </p:nvGrpSpPr>
-      <p:grpSpPr>
-        <a:xfrm>
-          <a:off x="0" y="0"/>
-          <a:ext cx="0" cy="0"/>
-          <a:chOff x="0" y="0"/>
-          <a:chExt cx="0" cy="0"/>
-        </a:xfrm>
-      </p:grpSpPr>
-      <p:sp>
-        <p:nvSpPr>
-          <p:cNvPr id="2" name="讲课提示"/>
-          <p:cNvSpPr txBox="1"/>
-          <p:nvPr/>
-        </p:nvSpPr>
-        <p:spPr>
-          <a:xfrm>
-            <a:off x="457200" y="457200"/>
-            <a:ext cx="6858000" cy="4800600"/>
-          </a:xfrm>
-          <a:prstGeom prst="rect">
-            <a:avLst/>
-          </a:prstGeom>
-        </p:spPr>
-        <p:txBody>
-          <a:bodyPr wrap="square"/>
-          <a:lstStyle/>
-          <a:p>
-            <a:r>
-              <a:rPr lang="zh-CN" dirty="0"/>
-              <a:t>第 18 节 · 核心知识点：单元 3 验收复盘</a:t>
-            </a:r>
-          </a:p>
-          <a:p>
-            <a:r>
-              <a:rPr lang="zh-CN" dirty="0"/>
-              <a:t/>
-            </a:r>
-          </a:p>
-          <a:p>
-            <a:r>
-              <a:rPr lang="zh-CN" dirty="0"/>
-              <a:t>讲这一页时：先让学生说出上节课的结论，再逐块讲要点。</a:t>
-            </a:r>
-          </a:p>
-          <a:p>
-            <a:r>
-              <a:rPr lang="zh-CN" dirty="0"/>
-              <a:t>每讲完一块，问一句「这一步如果写错了，报错会长什么样？」——把错误提前讲。</a:t>
-            </a:r>
-          </a:p>
-          <a:p>
-            <a:r>
-              <a:rPr lang="zh-CN" dirty="0"/>
-              <a:t/>
-            </a:r>
-          </a:p>
-          <a:p>
-            <a:r>
-              <a:rPr lang="zh-CN" dirty="0"/>
-              <a:t>本节目标：确认循环、range、推导式、切片、元组都过关</a:t>
-            </a:r>
-          </a:p>
-          <a:p>
-            <a:r>
-              <a:rPr lang="zh-CN" dirty="0"/>
-              <a:t/>
-            </a:r>
-          </a:p>
-          <a:p>
-            <a:r>
-              <a:rPr lang="zh-CN" dirty="0"/>
-              <a:t>看不到懂的地方，回讲义对应小节读一遍，再回来对着这页复述一次——能讲出来才算真懂。</a:t>
-            </a:r>
-          </a:p>
-        </p:txBody>
-      </p:sp>
-    </p:spTree>
-  </p:cSld>
-  <p:clrMapOvr>
-    <a:masterClrMapping/>
-  </p:clrMapOvr>
-</p:notes>
-</file>
-
-<file path=ppt/notesSlides/notesSlide12.xml><?xml version="1.0" encoding="utf-8"?>
-<p:notes xmlns:a="http://schemas.openxmlformats.org/drawingml/2006/main" xmlns:p="http://schemas.openxmlformats.org/presentationml/2006/main" xmlns:r="http://schemas.openxmlformats.org/officeDocument/2006/relationships">
-  <p:cSld>
-    <p:spTree>
-      <p:nvGrpSpPr>
-        <p:cNvPr id="1" name=""/>
-        <p:cNvGrpSpPr/>
-        <p:nvPr/>
-      </p:nvGrpSpPr>
-      <p:grpSpPr>
-        <a:xfrm>
-          <a:off x="0" y="0"/>
-          <a:ext cx="0" cy="0"/>
-          <a:chOff x="0" y="0"/>
-          <a:chExt cx="0" cy="0"/>
-        </a:xfrm>
-      </p:grpSpPr>
-      <p:sp>
-        <p:nvSpPr>
-          <p:cNvPr id="2" name="讲课提示"/>
-          <p:cNvSpPr txBox="1"/>
-          <p:nvPr/>
-        </p:nvSpPr>
-        <p:spPr>
-          <a:xfrm>
-            <a:off x="457200" y="457200"/>
-            <a:ext cx="6858000" cy="4800600"/>
-          </a:xfrm>
-          <a:prstGeom prst="rect">
-            <a:avLst/>
-          </a:prstGeom>
-        </p:spPr>
-        <p:txBody>
-          <a:bodyPr wrap="square"/>
-          <a:lstStyle/>
-          <a:p>
-            <a:r>
-              <a:rPr lang="zh-CN" dirty="0"/>
-              <a:t>单元 3 小结 · 单元 3 · 小结</a:t>
-            </a:r>
-          </a:p>
-          <a:p>
-            <a:r>
-              <a:rPr lang="zh-CN" dirty="0"/>
-              <a:t/>
-            </a:r>
-          </a:p>
-          <a:p>
-            <a:r>
-              <a:rPr lang="zh-CN" dirty="0"/>
-              <a:t>收尾动作：让学生合上讲义，口述本单元三个最重要的结论；说不出来的，回对应课节。</a:t>
-            </a:r>
-          </a:p>
-          <a:p>
-            <a:r>
-              <a:rPr lang="zh-CN" dirty="0"/>
-              <a:t>然后当场勾一遍本单元课节的「已完成」，没打勾的进下一单元前补掉。</a:t>
-            </a:r>
-          </a:p>
-        </p:txBody>
-      </p:sp>
-    </p:spTree>
-  </p:cSld>
-  <p:clrMapOvr>
-    <a:masterClrMapping/>
-  </p:clrMapOvr>
-</p:notes>
-</file>
-
-<file path=ppt/notesSlides/notesSlide2.xml><?xml version="1.0" encoding="utf-8"?>
-<p:notes xmlns:a="http://schemas.openxmlformats.org/drawingml/2006/main" xmlns:p="http://schemas.openxmlformats.org/presentationml/2006/main" xmlns:r="http://schemas.openxmlformats.org/officeDocument/2006/relationships">
-  <p:cSld>
-    <p:spTree>
-      <p:nvGrpSpPr>
-        <p:cNvPr id="1" name=""/>
-        <p:cNvGrpSpPr/>
-        <p:nvPr/>
-      </p:nvGrpSpPr>
-      <p:grpSpPr>
-        <a:xfrm>
-          <a:off x="0" y="0"/>
-          <a:ext cx="0" cy="0"/>
-          <a:chOff x="0" y="0"/>
-          <a:chExt cx="0" cy="0"/>
-        </a:xfrm>
-      </p:grpSpPr>
-      <p:sp>
-        <p:nvSpPr>
-          <p:cNvPr id="2" name="讲课提示"/>
-          <p:cNvSpPr txBox="1"/>
-          <p:nvPr/>
-        </p:nvSpPr>
-        <p:spPr>
-          <a:xfrm>
-            <a:off x="457200" y="457200"/>
-            <a:ext cx="6858000" cy="4800600"/>
-          </a:xfrm>
-          <a:prstGeom prst="rect">
-            <a:avLst/>
-          </a:prstGeom>
-        </p:spPr>
-        <p:txBody>
-          <a:bodyPr wrap="square"/>
-          <a:lstStyle/>
-          <a:p>
-            <a:r>
-              <a:rPr lang="zh-CN" dirty="0"/>
-              <a:t>第 14 节 · for 循环：把重复交给机器</a:t>
-            </a:r>
-          </a:p>
-          <a:p>
-            <a:r>
-              <a:rPr lang="zh-CN" dirty="0"/>
-              <a:t>单元 3 · 操作列表 · W3</a:t>
-            </a:r>
-          </a:p>
-          <a:p>
-            <a:r>
-              <a:rPr lang="zh-CN" dirty="0"/>
-              <a:t/>
-            </a:r>
-          </a:p>
-          <a:p>
-            <a:r>
-              <a:rPr lang="zh-CN" dirty="0"/>
-              <a:t>学习目标：会用 for 遍历列表，避开常见缩进错误</a:t>
-            </a:r>
-          </a:p>
-          <a:p>
-            <a:r>
-              <a:rPr lang="zh-CN" dirty="0"/>
-              <a:t/>
-            </a:r>
-          </a:p>
-          <a:p>
-            <a:r>
-              <a:rPr lang="zh-CN" dirty="0"/>
-              <a:t>课堂实操（40 分钟，不看答案）：</a:t>
-            </a:r>
-          </a:p>
-          <a:p>
-            <a:r>
-              <a:rPr lang="zh-CN" dirty="0"/>
-              <a:t>· 故意写四种缩进错误并当场读懂报错</a:t>
-            </a:r>
-          </a:p>
-          <a:p>
-            <a:r>
-              <a:rPr lang="zh-CN" dirty="0"/>
-              <a:t>· 把 5 行重复代码改成一个循环</a:t>
-            </a:r>
-          </a:p>
-          <a:p>
-            <a:r>
-              <a:rPr lang="zh-CN" dirty="0"/>
-              <a:t/>
-            </a:r>
-          </a:p>
-          <a:p>
-            <a:r>
-              <a:rPr lang="zh-CN" dirty="0"/>
-              <a:t>课后作业：</a:t>
-            </a:r>
-          </a:p>
-          <a:p>
-            <a:r>
-              <a:rPr lang="zh-CN" dirty="0"/>
-              <a:t>· 完成动手练习基础档</a:t>
-            </a:r>
-          </a:p>
-          <a:p>
-            <a:r>
-              <a:rPr lang="zh-CN" dirty="0"/>
-              <a:t/>
-            </a:r>
-          </a:p>
-          <a:p>
-            <a:r>
-              <a:rPr lang="zh-CN" dirty="0"/>
-              <a:t>节奏：讲 20 分钟 → 学员自己敲 40 分钟（不看答案）→ 对讲评自查 20 分钟 → 写作业 10 分钟。</a:t>
-            </a:r>
-          </a:p>
-        </p:txBody>
-      </p:sp>
-    </p:spTree>
-  </p:cSld>
-  <p:clrMapOvr>
-    <a:masterClrMapping/>
-  </p:clrMapOvr>
-</p:notes>
-</file>
-
-<file path=ppt/notesSlides/notesSlide3.xml><?xml version="1.0" encoding="utf-8"?>
-<p:notes xmlns:a="http://schemas.openxmlformats.org/drawingml/2006/main" xmlns:p="http://schemas.openxmlformats.org/presentationml/2006/main" xmlns:r="http://schemas.openxmlformats.org/officeDocument/2006/relationships">
-  <p:cSld>
-    <p:spTree>
-      <p:nvGrpSpPr>
-        <p:cNvPr id="1" name=""/>
-        <p:cNvGrpSpPr/>
-        <p:nvPr/>
-      </p:nvGrpSpPr>
-      <p:grpSpPr>
-        <a:xfrm>
-          <a:off x="0" y="0"/>
-          <a:ext cx="0" cy="0"/>
-          <a:chOff x="0" y="0"/>
-          <a:chExt cx="0" cy="0"/>
-        </a:xfrm>
-      </p:grpSpPr>
-      <p:sp>
-        <p:nvSpPr>
-          <p:cNvPr id="2" name="讲课提示"/>
-          <p:cNvSpPr txBox="1"/>
-          <p:nvPr/>
-        </p:nvSpPr>
-        <p:spPr>
-          <a:xfrm>
-            <a:off x="457200" y="457200"/>
-            <a:ext cx="6858000" cy="4800600"/>
-          </a:xfrm>
-          <a:prstGeom prst="rect">
-            <a:avLst/>
-          </a:prstGeom>
-        </p:spPr>
-        <p:txBody>
-          <a:bodyPr wrap="square"/>
-          <a:lstStyle/>
-          <a:p>
-            <a:r>
-              <a:rPr lang="zh-CN" dirty="0"/>
-              <a:t>第 14 节 · 核心知识点：for 循环：把重复交给机器</a:t>
-            </a:r>
-          </a:p>
-          <a:p>
-            <a:r>
-              <a:rPr lang="zh-CN" dirty="0"/>
-              <a:t/>
-            </a:r>
-          </a:p>
-          <a:p>
-            <a:r>
-              <a:rPr lang="zh-CN" dirty="0"/>
-              <a:t>讲这一页时：先让学生说出上节课的结论，再逐块讲要点。</a:t>
-            </a:r>
-          </a:p>
-          <a:p>
-            <a:r>
-              <a:rPr lang="zh-CN" dirty="0"/>
-              <a:t>每讲完一块，问一句「这一步如果写错了，报错会长什么样？」——把错误提前讲。</a:t>
-            </a:r>
-          </a:p>
-          <a:p>
-            <a:r>
-              <a:rPr lang="zh-CN" dirty="0"/>
-              <a:t/>
-            </a:r>
-          </a:p>
-          <a:p>
-            <a:r>
-              <a:rPr lang="zh-CN" dirty="0"/>
-              <a:t>本节目标：会用 for 遍历列表，避开常见缩进错误</a:t>
-            </a:r>
-          </a:p>
-          <a:p>
-            <a:r>
-              <a:rPr lang="zh-CN" dirty="0"/>
-              <a:t/>
-            </a:r>
-          </a:p>
-          <a:p>
-            <a:r>
-              <a:rPr lang="zh-CN" dirty="0"/>
-              <a:t>看不到懂的地方，回讲义对应小节读一遍，再回来对着这页复述一次——能讲出来才算真懂。</a:t>
-            </a:r>
-          </a:p>
-        </p:txBody>
-      </p:sp>
-    </p:spTree>
-  </p:cSld>
-  <p:clrMapOvr>
-    <a:masterClrMapping/>
-  </p:clrMapOvr>
-</p:notes>
-</file>
-
-<file path=ppt/notesSlides/notesSlide4.xml><?xml version="1.0" encoding="utf-8"?>
-<p:notes xmlns:a="http://schemas.openxmlformats.org/drawingml/2006/main" xmlns:p="http://schemas.openxmlformats.org/presentationml/2006/main" xmlns:r="http://schemas.openxmlformats.org/officeDocument/2006/relationships">
-  <p:cSld>
-    <p:spTree>
-      <p:nvGrpSpPr>
-        <p:cNvPr id="1" name=""/>
-        <p:cNvGrpSpPr/>
-        <p:nvPr/>
-      </p:nvGrpSpPr>
-      <p:grpSpPr>
-        <a:xfrm>
-          <a:off x="0" y="0"/>
-          <a:ext cx="0" cy="0"/>
-          <a:chOff x="0" y="0"/>
-          <a:chExt cx="0" cy="0"/>
-        </a:xfrm>
-      </p:grpSpPr>
-      <p:sp>
-        <p:nvSpPr>
-          <p:cNvPr id="2" name="讲课提示"/>
-          <p:cNvSpPr txBox="1"/>
-          <p:nvPr/>
-        </p:nvSpPr>
-        <p:spPr>
-          <a:xfrm>
-            <a:off x="457200" y="457200"/>
-            <a:ext cx="6858000" cy="4800600"/>
-          </a:xfrm>
-          <a:prstGeom prst="rect">
-            <a:avLst/>
-          </a:prstGeom>
-        </p:spPr>
-        <p:txBody>
-          <a:bodyPr wrap="square"/>
-          <a:lstStyle/>
-          <a:p>
-            <a:r>
-              <a:rPr lang="zh-CN" dirty="0"/>
-              <a:t>第 15 节 · range() 与列表推导式</a:t>
-            </a:r>
-          </a:p>
-          <a:p>
-            <a:r>
-              <a:rPr lang="zh-CN" dirty="0"/>
-              <a:t>单元 3 · 操作列表 · W3</a:t>
-            </a:r>
-          </a:p>
-          <a:p>
-            <a:r>
-              <a:rPr lang="zh-CN" dirty="0"/>
-              <a:t/>
-            </a:r>
-          </a:p>
-          <a:p>
-            <a:r>
-              <a:rPr lang="zh-CN" dirty="0"/>
-              <a:t>学习目标：掌握 range 的各种形式，能用推导式一行搞定筛选</a:t>
-            </a:r>
-          </a:p>
-          <a:p>
-            <a:r>
-              <a:rPr lang="zh-CN" dirty="0"/>
-              <a:t/>
-            </a:r>
-          </a:p>
-          <a:p>
-            <a:r>
-              <a:rPr lang="zh-CN" dirty="0"/>
-              <a:t>课堂实操（40 分钟，不看答案）：</a:t>
-            </a:r>
-          </a:p>
-          <a:p>
-            <a:r>
-              <a:rPr lang="zh-CN" dirty="0"/>
-              <a:t>· 预测 range(2,10,3) 的结果再验证</a:t>
-            </a:r>
-          </a:p>
-          <a:p>
-            <a:r>
-              <a:rPr lang="zh-CN" dirty="0"/>
-              <a:t>· 把 5 行循环改写成一行推导式</a:t>
-            </a:r>
-          </a:p>
-          <a:p>
-            <a:r>
-              <a:rPr lang="zh-CN" dirty="0"/>
-              <a:t/>
-            </a:r>
-          </a:p>
-          <a:p>
-            <a:r>
-              <a:rPr lang="zh-CN" dirty="0"/>
-              <a:t>课后作业：</a:t>
-            </a:r>
-          </a:p>
-          <a:p>
-            <a:r>
-              <a:rPr lang="zh-CN" dirty="0"/>
-              <a:t>· 完成动手练习进阶档</a:t>
-            </a:r>
-          </a:p>
-          <a:p>
-            <a:r>
-              <a:rPr lang="zh-CN" dirty="0"/>
-              <a:t/>
-            </a:r>
-          </a:p>
-          <a:p>
-            <a:r>
-              <a:rPr lang="zh-CN" dirty="0"/>
-              <a:t>节奏：讲 20 分钟 → 学员自己敲 40 分钟（不看答案）→ 对讲评自查 20 分钟 → 写作业 10 分钟。</a:t>
-            </a:r>
-          </a:p>
-        </p:txBody>
-      </p:sp>
-    </p:spTree>
-  </p:cSld>
-  <p:clrMapOvr>
-    <a:masterClrMapping/>
-  </p:clrMapOvr>
-</p:notes>
-</file>
-
-<file path=ppt/notesSlides/notesSlide5.xml><?xml version="1.0" encoding="utf-8"?>
-<p:notes xmlns:a="http://schemas.openxmlformats.org/drawingml/2006/main" xmlns:p="http://schemas.openxmlformats.org/presentationml/2006/main" xmlns:r="http://schemas.openxmlformats.org/officeDocument/2006/relationships">
-  <p:cSld>
-    <p:spTree>
-      <p:nvGrpSpPr>
-        <p:cNvPr id="1" name=""/>
-        <p:cNvGrpSpPr/>
-        <p:nvPr/>
-      </p:nvGrpSpPr>
-      <p:grpSpPr>
-        <a:xfrm>
-          <a:off x="0" y="0"/>
-          <a:ext cx="0" cy="0"/>
-          <a:chOff x="0" y="0"/>
-          <a:chExt cx="0" cy="0"/>
-        </a:xfrm>
-      </p:grpSpPr>
-      <p:sp>
-        <p:nvSpPr>
-          <p:cNvPr id="2" name="讲课提示"/>
-          <p:cNvSpPr txBox="1"/>
-          <p:nvPr/>
-        </p:nvSpPr>
-        <p:spPr>
-          <a:xfrm>
-            <a:off x="457200" y="457200"/>
-            <a:ext cx="6858000" cy="4800600"/>
-          </a:xfrm>
-          <a:prstGeom prst="rect">
-            <a:avLst/>
-          </a:prstGeom>
-        </p:spPr>
-        <p:txBody>
-          <a:bodyPr wrap="square"/>
-          <a:lstStyle/>
-          <a:p>
-            <a:r>
-              <a:rPr lang="zh-CN" dirty="0"/>
-              <a:t>第 15 节 · 核心知识点：range() 与列表推导式</a:t>
-            </a:r>
-          </a:p>
-          <a:p>
-            <a:r>
-              <a:rPr lang="zh-CN" dirty="0"/>
-              <a:t/>
-            </a:r>
-          </a:p>
-          <a:p>
-            <a:r>
-              <a:rPr lang="zh-CN" dirty="0"/>
-              <a:t>讲这一页时：先让学生说出上节课的结论，再逐块讲要点。</a:t>
-            </a:r>
-          </a:p>
-          <a:p>
-            <a:r>
-              <a:rPr lang="zh-CN" dirty="0"/>
-              <a:t>每讲完一块，问一句「这一步如果写错了，报错会长什么样？」——把错误提前讲。</a:t>
-            </a:r>
-          </a:p>
-          <a:p>
-            <a:r>
-              <a:rPr lang="zh-CN" dirty="0"/>
-              <a:t/>
-            </a:r>
-          </a:p>
-          <a:p>
-            <a:r>
-              <a:rPr lang="zh-CN" dirty="0"/>
-              <a:t>本节目标：掌握 range 的各种形式，能用推导式一行搞定筛选</a:t>
-            </a:r>
-          </a:p>
-          <a:p>
-            <a:r>
-              <a:rPr lang="zh-CN" dirty="0"/>
-              <a:t/>
-            </a:r>
-          </a:p>
-          <a:p>
-            <a:r>
-              <a:rPr lang="zh-CN" dirty="0"/>
-              <a:t>看不到懂的地方，回讲义对应小节读一遍，再回来对着这页复述一次——能讲出来才算真懂。</a:t>
-            </a:r>
-          </a:p>
-        </p:txBody>
-      </p:sp>
-    </p:spTree>
-  </p:cSld>
-  <p:clrMapOvr>
-    <a:masterClrMapping/>
-  </p:clrMapOvr>
-</p:notes>
-</file>
-
-<file path=ppt/notesSlides/notesSlide6.xml><?xml version="1.0" encoding="utf-8"?>
-<p:notes xmlns:a="http://schemas.openxmlformats.org/drawingml/2006/main" xmlns:p="http://schemas.openxmlformats.org/presentationml/2006/main" xmlns:r="http://schemas.openxmlformats.org/officeDocument/2006/relationships">
-  <p:cSld>
-    <p:spTree>
-      <p:nvGrpSpPr>
-        <p:cNvPr id="1" name=""/>
-        <p:cNvGrpSpPr/>
-        <p:nvPr/>
-      </p:nvGrpSpPr>
-      <p:grpSpPr>
-        <a:xfrm>
-          <a:off x="0" y="0"/>
-          <a:ext cx="0" cy="0"/>
-          <a:chOff x="0" y="0"/>
-          <a:chExt cx="0" cy="0"/>
-        </a:xfrm>
-      </p:grpSpPr>
-      <p:sp>
-        <p:nvSpPr>
-          <p:cNvPr id="2" name="讲课提示"/>
-          <p:cNvSpPr txBox="1"/>
-          <p:nvPr/>
-        </p:nvSpPr>
-        <p:spPr>
-          <a:xfrm>
-            <a:off x="457200" y="457200"/>
-            <a:ext cx="6858000" cy="4800600"/>
-          </a:xfrm>
-          <a:prstGeom prst="rect">
-            <a:avLst/>
-          </a:prstGeom>
-        </p:spPr>
-        <p:txBody>
-          <a:bodyPr wrap="square"/>
-          <a:lstStyle/>
-          <a:p>
-            <a:r>
-              <a:rPr lang="zh-CN" dirty="0"/>
-              <a:t>第 16 节 · 切片、元组与 PEP 8 排版</a:t>
-            </a:r>
-          </a:p>
-          <a:p>
-            <a:r>
-              <a:rPr lang="zh-CN" dirty="0"/>
-              <a:t>单元 3 · 操作列表 · W3</a:t>
-            </a:r>
-          </a:p>
-          <a:p>
-            <a:r>
-              <a:rPr lang="zh-CN" dirty="0"/>
-              <a:t/>
-            </a:r>
-          </a:p>
-          <a:p>
-            <a:r>
-              <a:rPr lang="zh-CN" dirty="0"/>
-              <a:t>学习目标：掌握切片三个参数与元组的不可变性，能按 PEP 8 排版</a:t>
-            </a:r>
-          </a:p>
-          <a:p>
-            <a:r>
-              <a:rPr lang="zh-CN" dirty="0"/>
-              <a:t/>
-            </a:r>
-          </a:p>
-          <a:p>
-            <a:r>
-              <a:rPr lang="zh-CN" dirty="0"/>
-              <a:t>课堂实操（40 分钟，不看答案）：</a:t>
-            </a:r>
-          </a:p>
-          <a:p>
-            <a:r>
-              <a:rPr lang="zh-CN" dirty="0"/>
-              <a:t>· 用切片取出字符串后 5 个字符</a:t>
-            </a:r>
-          </a:p>
-          <a:p>
-            <a:r>
-              <a:rPr lang="zh-CN" dirty="0"/>
-              <a:t>· 故意给元组赋值看报错</a:t>
-            </a:r>
-          </a:p>
-          <a:p>
-            <a:r>
-              <a:rPr lang="zh-CN" dirty="0"/>
-              <a:t>· 把一段故意写乱的代码排版规范</a:t>
-            </a:r>
-          </a:p>
-          <a:p>
-            <a:r>
-              <a:rPr lang="zh-CN" dirty="0"/>
-              <a:t/>
-            </a:r>
-          </a:p>
-          <a:p>
-            <a:r>
-              <a:rPr lang="zh-CN" dirty="0"/>
-              <a:t>课后作业：</a:t>
-            </a:r>
-          </a:p>
-          <a:p>
-            <a:r>
-              <a:rPr lang="zh-CN" dirty="0"/>
-              <a:t>· 完成题库 L1-5、L1-6</a:t>
-            </a:r>
-          </a:p>
-          <a:p>
-            <a:r>
-              <a:rPr lang="zh-CN" dirty="0"/>
-              <a:t/>
-            </a:r>
-          </a:p>
-          <a:p>
-            <a:r>
-              <a:rPr lang="zh-CN" dirty="0"/>
-              <a:t>节奏：讲 20 分钟 → 学员自己敲 40 分钟（不看答案）→ 对讲评自查 20 分钟 → 写作业 10 分钟。</a:t>
-            </a:r>
-          </a:p>
-        </p:txBody>
-      </p:sp>
-    </p:spTree>
-  </p:cSld>
-  <p:clrMapOvr>
-    <a:masterClrMapping/>
-  </p:clrMapOvr>
-</p:notes>
-</file>
-
-<file path=ppt/notesSlides/notesSlide7.xml><?xml version="1.0" encoding="utf-8"?>
-<p:notes xmlns:a="http://schemas.openxmlformats.org/drawingml/2006/main" xmlns:p="http://schemas.openxmlformats.org/presentationml/2006/main" xmlns:r="http://schemas.openxmlformats.org/officeDocument/2006/relationships">
-  <p:cSld>
-    <p:spTree>
-      <p:nvGrpSpPr>
-        <p:cNvPr id="1" name=""/>
-        <p:cNvGrpSpPr/>
-        <p:nvPr/>
-      </p:nvGrpSpPr>
-      <p:grpSpPr>
-        <a:xfrm>
-          <a:off x="0" y="0"/>
-          <a:ext cx="0" cy="0"/>
-          <a:chOff x="0" y="0"/>
-          <a:chExt cx="0" cy="0"/>
-        </a:xfrm>
-      </p:grpSpPr>
-      <p:sp>
-        <p:nvSpPr>
-          <p:cNvPr id="2" name="讲课提示"/>
-          <p:cNvSpPr txBox="1"/>
-          <p:nvPr/>
-        </p:nvSpPr>
-        <p:spPr>
-          <a:xfrm>
-            <a:off x="457200" y="457200"/>
-            <a:ext cx="6858000" cy="4800600"/>
-          </a:xfrm>
-          <a:prstGeom prst="rect">
-            <a:avLst/>
-          </a:prstGeom>
-        </p:spPr>
-        <p:txBody>
-          <a:bodyPr wrap="square"/>
-          <a:lstStyle/>
-          <a:p>
-            <a:r>
-              <a:rPr lang="zh-CN" dirty="0"/>
-              <a:t>第 16 节 · 核心知识点：切片、元组与 PEP 8 排版</a:t>
-            </a:r>
-          </a:p>
-          <a:p>
-            <a:r>
-              <a:rPr lang="zh-CN" dirty="0"/>
-              <a:t/>
-            </a:r>
-          </a:p>
-          <a:p>
-            <a:r>
-              <a:rPr lang="zh-CN" dirty="0"/>
-              <a:t>讲这一页时：先让学生说出上节课的结论，再逐块讲要点。</a:t>
-            </a:r>
-          </a:p>
-          <a:p>
-            <a:r>
-              <a:rPr lang="zh-CN" dirty="0"/>
-              <a:t>每讲完一块，问一句「这一步如果写错了，报错会长什么样？」——把错误提前讲。</a:t>
-            </a:r>
-          </a:p>
-          <a:p>
-            <a:r>
-              <a:rPr lang="zh-CN" dirty="0"/>
-              <a:t/>
-            </a:r>
-          </a:p>
-          <a:p>
-            <a:r>
-              <a:rPr lang="zh-CN" dirty="0"/>
-              <a:t>本节目标：掌握切片三个参数与元组的不可变性，能按 PEP 8 排版</a:t>
-            </a:r>
-          </a:p>
-          <a:p>
-            <a:r>
-              <a:rPr lang="zh-CN" dirty="0"/>
-              <a:t/>
-            </a:r>
-          </a:p>
-          <a:p>
-            <a:r>
-              <a:rPr lang="zh-CN" dirty="0"/>
-              <a:t>看不到懂的地方，回讲义对应小节读一遍，再回来对着这页复述一次——能讲出来才算真懂。</a:t>
-            </a:r>
-          </a:p>
-        </p:txBody>
-      </p:sp>
-    </p:spTree>
-  </p:cSld>
-  <p:clrMapOvr>
-    <a:masterClrMapping/>
-  </p:clrMapOvr>
-</p:notes>
-</file>
-
-<file path=ppt/notesSlides/notesSlide8.xml><?xml version="1.0" encoding="utf-8"?>
-<p:notes xmlns:a="http://schemas.openxmlformats.org/drawingml/2006/main" xmlns:p="http://schemas.openxmlformats.org/presentationml/2006/main" xmlns:r="http://schemas.openxmlformats.org/officeDocument/2006/relationships">
-  <p:cSld>
-    <p:spTree>
-      <p:nvGrpSpPr>
-        <p:cNvPr id="1" name=""/>
-        <p:cNvGrpSpPr/>
-        <p:nvPr/>
-      </p:nvGrpSpPr>
-      <p:grpSpPr>
-        <a:xfrm>
-          <a:off x="0" y="0"/>
-          <a:ext cx="0" cy="0"/>
-          <a:chOff x="0" y="0"/>
-          <a:chExt cx="0" cy="0"/>
-        </a:xfrm>
-      </p:grpSpPr>
-      <p:sp>
-        <p:nvSpPr>
-          <p:cNvPr id="2" name="讲课提示"/>
-          <p:cNvSpPr txBox="1"/>
-          <p:nvPr/>
-        </p:nvSpPr>
-        <p:spPr>
-          <a:xfrm>
-            <a:off x="457200" y="457200"/>
-            <a:ext cx="6858000" cy="4800600"/>
-          </a:xfrm>
-          <a:prstGeom prst="rect">
-            <a:avLst/>
-          </a:prstGeom>
-        </p:spPr>
-        <p:txBody>
-          <a:bodyPr wrap="square"/>
-          <a:lstStyle/>
-          <a:p>
-            <a:r>
-              <a:rPr lang="zh-CN" dirty="0"/>
-              <a:t>第 17 节 · 动手实战与答案讲评</a:t>
-            </a:r>
-          </a:p>
-          <a:p>
-            <a:r>
-              <a:rPr lang="zh-CN" dirty="0"/>
-              <a:t>单元 3 · 操作列表 · W3</a:t>
-            </a:r>
-          </a:p>
-          <a:p>
-            <a:r>
-              <a:rPr lang="zh-CN" dirty="0"/>
-              <a:t/>
-            </a:r>
-          </a:p>
-          <a:p>
-            <a:r>
-              <a:rPr lang="zh-CN" dirty="0"/>
-              <a:t>学习目标：独立完成单元 3 练习，巩固循环、推导式与元组</a:t>
-            </a:r>
-          </a:p>
-          <a:p>
-            <a:r>
-              <a:rPr lang="zh-CN" dirty="0"/>
-              <a:t/>
-            </a:r>
-          </a:p>
-          <a:p>
-            <a:r>
-              <a:rPr lang="zh-CN" dirty="0"/>
-              <a:t>课堂实操（40 分钟，不看答案）：</a:t>
-            </a:r>
-          </a:p>
-          <a:p>
-            <a:r>
-              <a:rPr lang="zh-CN" dirty="0"/>
-              <a:t>· 限时 30 分钟独立完成基础档</a:t>
-            </a:r>
-          </a:p>
-          <a:p>
-            <a:r>
-              <a:rPr lang="zh-CN" dirty="0"/>
-              <a:t>· 逐题对照答案讲评</a:t>
-            </a:r>
-          </a:p>
-          <a:p>
-            <a:r>
-              <a:rPr lang="zh-CN" dirty="0"/>
-              <a:t/>
-            </a:r>
-          </a:p>
-          <a:p>
-            <a:r>
-              <a:rPr lang="zh-CN" dirty="0"/>
-              <a:t>课后作业：</a:t>
-            </a:r>
-          </a:p>
-          <a:p>
-            <a:r>
-              <a:rPr lang="zh-CN" dirty="0"/>
-              <a:t>· ★ 完成动手项目 3.4–3.8 忘记密码清单</a:t>
-            </a:r>
-          </a:p>
-          <a:p>
-            <a:r>
-              <a:rPr lang="zh-CN" dirty="0"/>
-              <a:t>· 产出：忘记密码清单程序</a:t>
-            </a:r>
-          </a:p>
-          <a:p>
-            <a:r>
-              <a:rPr lang="zh-CN" dirty="0"/>
-              <a:t/>
-            </a:r>
-          </a:p>
-          <a:p>
-            <a:r>
-              <a:rPr lang="zh-CN" dirty="0"/>
-              <a:t>节奏：讲 20 分钟 → 学员自己敲 40 分钟（不看答案）→ 对讲评自查 20 分钟 → 写作业 10 分钟。</a:t>
-            </a:r>
-          </a:p>
-        </p:txBody>
-      </p:sp>
-    </p:spTree>
-  </p:cSld>
-  <p:clrMapOvr>
-    <a:masterClrMapping/>
-  </p:clrMapOvr>
-</p:notes>
-</file>
-
-<file path=ppt/notesSlides/notesSlide9.xml><?xml version="1.0" encoding="utf-8"?>
-<p:notes xmlns:a="http://schemas.openxmlformats.org/drawingml/2006/main" xmlns:p="http://schemas.openxmlformats.org/presentationml/2006/main" xmlns:r="http://schemas.openxmlformats.org/officeDocument/2006/relationships">
-  <p:cSld>
-    <p:spTree>
-      <p:nvGrpSpPr>
-        <p:cNvPr id="1" name=""/>
-        <p:cNvGrpSpPr/>
-        <p:nvPr/>
-      </p:nvGrpSpPr>
-      <p:grpSpPr>
-        <a:xfrm>
-          <a:off x="0" y="0"/>
-          <a:ext cx="0" cy="0"/>
-          <a:chOff x="0" y="0"/>
-          <a:chExt cx="0" cy="0"/>
-        </a:xfrm>
-      </p:grpSpPr>
-      <p:sp>
-        <p:nvSpPr>
-          <p:cNvPr id="2" name="讲课提示"/>
-          <p:cNvSpPr txBox="1"/>
-          <p:nvPr/>
-        </p:nvSpPr>
-        <p:spPr>
-          <a:xfrm>
-            <a:off x="457200" y="457200"/>
-            <a:ext cx="6858000" cy="4800600"/>
-          </a:xfrm>
-          <a:prstGeom prst="rect">
-            <a:avLst/>
-          </a:prstGeom>
-        </p:spPr>
-        <p:txBody>
-          <a:bodyPr wrap="square"/>
-          <a:lstStyle/>
-          <a:p>
-            <a:r>
-              <a:rPr lang="zh-CN" dirty="0"/>
-              <a:t>第 17 节 · 核心知识点：动手实战与答案讲评</a:t>
-            </a:r>
-          </a:p>
-          <a:p>
-            <a:r>
-              <a:rPr lang="zh-CN" dirty="0"/>
-              <a:t/>
-            </a:r>
-          </a:p>
-          <a:p>
-            <a:r>
-              <a:rPr lang="zh-CN" dirty="0"/>
-              <a:t>讲这一页时：先让学生说出上节课的结论，再逐块讲要点。</a:t>
-            </a:r>
-          </a:p>
-          <a:p>
-            <a:r>
-              <a:rPr lang="zh-CN" dirty="0"/>
-              <a:t>每讲完一块，问一句「这一步如果写错了，报错会长什么样？」——把错误提前讲。</a:t>
-            </a:r>
-          </a:p>
-          <a:p>
-            <a:r>
-              <a:rPr lang="zh-CN" dirty="0"/>
-              <a:t/>
-            </a:r>
-          </a:p>
-          <a:p>
-            <a:r>
-              <a:rPr lang="zh-CN" dirty="0"/>
-              <a:t>本节目标：独立完成单元 3 练习，巩固循环、推导式与元组</a:t>
-            </a:r>
-          </a:p>
-          <a:p>
-            <a:r>
-              <a:rPr lang="zh-CN" dirty="0"/>
-              <a:t/>
-            </a:r>
-          </a:p>
-          <a:p>
-            <a:r>
-              <a:rPr lang="zh-CN" dirty="0"/>
-              <a:t>看不到懂的地方，回讲义对应小节读一遍，再回来对着这页复述一次——能讲出来才算真懂。</a:t>
-            </a:r>
-          </a:p>
-        </p:txBody>
-      </p:sp>
-    </p:spTree>
-  </p:cSld>
-  <p:clrMapOvr>
-    <a:masterClrMapping/>
-  </p:clrMapOvr>
-</p:notes>
 </file>
 
 <file path=ppt/slideLayouts/slideLayout1.xml><?xml version="1.0" encoding="utf-8"?>

--- a/python-course-ppt/逐节课件/Python讲授课件-单元03.pptx
+++ b/python-course-ppt/逐节课件/Python讲授课件-单元03.pptx
@@ -2140,7 +2140,7 @@
   <p:cSld>
     <p:spTree>
       <p:nvGrpSpPr>
-        <p:cNvPr id="42" name="" descr="&lt;Slide style={{ width: '1280px', height: '720px', backgroundColor: '#FAFCFE', padding: 0, position: 'relative', overflow: 'hidden' }}&gt;&#13;&#10;    &lt;Box style={{ position: 'absolute', left: 64, top: 36, width: '1152px', flexDirection: 'row', alignItems: 'center', gap: 12 }}&gt;&#13;&#10;        &lt;Box style={{ background: '#0E9B78', borderRadius: 5, padding: '3px 11px' }}&gt;&#13;&#10;            &lt;Text style={{ fontSize: 14, fontWeight: 'bold', color: '#FFFFFF' }}&gt;第 14 节&lt;/Text&gt;&#13;&#10;        &lt;/Box&gt;&#13;&#10;        &lt;Text style={{ fontSize: 30, fontWeight: 'bold', color: '#16232E' }}&gt;核心知识点&lt;/Text&gt;&#13;&#10;        &lt;Text style={{ fontSize: 15, color: '#5A6B7A', marginTop: 10 }}&gt;· for 循环：把重复交给机器&lt;/Text&gt;&#13;&#10;    &lt;/Box&gt;&#13;&#10;    &lt;Box style={{ position: 'absolute', left: 0, top: 0, width: '1280px', height: '720px' }}&gt;&#13;&#10;        &lt;svg width='1280' height='720' viewBox='0 0 1280 720'&gt;&#13;&#10;            &lt;rect x='64' y='96' width='548' height='330' rx='12' fill='#FFFFFF' stroke='#D8E3EE' /&gt;&lt;rect x='64' y='96' width='548' height='4' rx='2' fill='#1F5FA8' /&gt;&lt;text x='82' y='130' fontSize='15.5' fontWeight='bold' fill='#1F5FA8' textAnchor='start' fontFamily='Microsoft YaHei'&gt;2.1 for 循环：把重复交给机器&lt;/text&gt;&lt;text x='82' y='169.0' fontSize='13' fill='#3A4A58' textAnchor='start' fontFamily='Microsoft YaHei'&gt;· 最关键的陷阱：缩进决定循环体。 只有缩进了的行才是循环体：&lt;/text&gt;&lt;rect x='668' y='96' width='548' height='330' rx='12' fill='#FFFFFF' stroke='#D8E3EE' /&gt;&lt;rect x='668' y='96' width='548' height='4' rx='2' fill='#1F5FA8' /&gt;&lt;text x='686' y='130' fontSize='15.5' fontWeight='bold' fill='#1F5FA8' textAnchor='start' fontFamily='Microsoft YaHei'&gt;2.2 range()：造出一串数字&lt;/text&gt;&lt;text x='686' y='169.0' fontSize='13' fill='#3A4A58' textAnchor='start' fontFamily='Microsoft YaHei'&gt;· 有时我们还没有列表，只想&quot;重复 N 次&quot;，这时用 range()：&lt;/text&gt;&lt;rect x='64' y='574' width='1152' height='66' rx='12' fill='#EEF5FB' /&gt;&lt;text x='84' y='616' fontSize='14' fill='#243444' textAnchor='start' fontFamily='Microsoft YaHei'&gt;看不懂的地方先回讲义对应小节读一遍，再回来对着这页复述一次——能讲出来才算真懂。&lt;/text&gt;&#13;&#10;            &lt;text x='64' y='684' fontSize='13' fill='#8A9AAA' fontFamily='Microsoft YaHei'&gt;Python 讲授课件 · 逐节版&lt;/text&gt;&#13;&#10;            &lt;text x='1216' y='684' fontSize='13' fill='#8A9AAA' textAnchor='end' fontFamily='Microsoft YaHei'&gt;单元 3 · 第 14 节&lt;/text&gt;&#13;&#10;        &lt;/svg&gt;&#13;&#10;    &lt;/Box&gt;&#13;&#10;&lt;/Slide&gt;&#13;&#10;"/>
+        <p:cNvPr id="42" name="" descr="&lt;Slide style={{ width: '1280px', height: '720px', backgroundColor: '#FAFCFE', padding: 0, position: 'relative', overflow: 'hidden' }}&gt;&#13;&#10;    &lt;Box style={{ position: 'absolute', left: 64, top: 36, width: '1152px', flexDirection: 'row', alignItems: 'center', gap: 12 }}&gt;&#13;&#10;        &lt;Box style={{ background: '#0E9B78', borderRadius: 5, padding: '3px 11px' }}&gt;&#13;&#10;            &lt;Text style={{ fontSize: 14, fontWeight: 'bold', color: '#FFFFFF' }}&gt;第 14 节&lt;/Text&gt;&#13;&#10;        &lt;/Box&gt;&#13;&#10;        &lt;Text style={{ fontSize: 30, fontWeight: 'bold', color: '#16232E' }}&gt;核心知识点&lt;/Text&gt;&#13;&#10;        &lt;Text style={{ fontSize: 15, color: '#5A6B7A', marginTop: 10 }}&gt;· for 循环：把重复交给机器&lt;/Text&gt;&#13;&#10;    &lt;/Box&gt;&#13;&#10;    &lt;Box style={{ position: 'absolute', left: 0, top: 0, width: '1280px', height: '720px' }}&gt;&#13;&#10;        &lt;svg width='1280' height='720' viewBox='0 0 1280 720'&gt;&#13;&#10;            &lt;rect x='64' y='96' width='548' height='330' rx='12' fill='#FFFFFF' stroke='#D8E3EE' /&gt;&lt;rect x='64' y='96' width='548' height='4' rx='2' fill='#1F5FA8' /&gt;&lt;text x='82' y='130' fontSize='15.5' fontWeight='bold' fill='#1F5FA8' textAnchor='start' fontFamily='Microsoft YaHei'&gt;2.1 for 循环：把重复交给机器&lt;/text&gt;&lt;text x='82' y='169.0' fontSize='13' fill='#3A4A58' textAnchor='start' fontFamily='Microsoft YaHei'&gt;· 最关键的陷阱：缩进决定循环体。&lt;/text&gt;&lt;rect x='668' y='96' width='548' height='330' rx='12' fill='#FFFFFF' stroke='#D8E3EE' /&gt;&lt;rect x='668' y='96' width='548' height='4' rx='2' fill='#1F5FA8' /&gt;&lt;text x='686' y='130' fontSize='15.5' fontWeight='bold' fill='#1F5FA8' textAnchor='start' fontFamily='Microsoft YaHei'&gt;2.2 range()：造出一串数字&lt;/text&gt;&lt;text x='686' y='169.0' fontSize='13' fill='#3A4A58' textAnchor='start' fontFamily='Microsoft YaHei'&gt;· 有时我们还没有列表，只想&quot;重复 N 次&quot;，这时用 range()：&lt;/text&gt;&lt;rect x='64' y='574' width='1152' height='66' rx='12' fill='#EEF5FB' /&gt;&lt;text x='84' y='616' fontSize='14' fill='#243444' textAnchor='start' fontFamily='Microsoft YaHei'&gt;看不懂的地方先回讲义对应小节读一遍，再回来对着这页复述一次——能讲出来才算真懂。&lt;/text&gt;&#13;&#10;            &lt;text x='64' y='684' fontSize='13' fill='#8A9AAA' fontFamily='Microsoft YaHei'&gt;Python 讲授课件 · 逐节版&lt;/text&gt;&#13;&#10;            &lt;text x='1216' y='684' fontSize='13' fill='#8A9AAA' textAnchor='end' fontFamily='Microsoft YaHei'&gt;单元 3 · 第 14 节&lt;/text&gt;&#13;&#10;        &lt;/svg&gt;&#13;&#10;    &lt;/Box&gt;&#13;&#10;&lt;/Slide&gt;&#13;&#10;"/>
         <p:cNvGrpSpPr/>
         <p:nvPr/>
       </p:nvGrpSpPr>
@@ -2581,7 +2581,7 @@
   <p:cSld>
     <p:spTree>
       <p:nvGrpSpPr>
-        <p:cNvPr id="55" name="" descr="&lt;Slide style={{ width: '1280px', height: '720px', backgroundColor: '#FAFCFE', padding: 0, position: 'relative', overflow: 'hidden' }}&gt;&#13;&#10;    &lt;Box style={{ position: 'absolute', left: 64, top: 36, width: '1152px', flexDirection: 'row', alignItems: 'center', gap: 12 }}&gt;&#13;&#10;        &lt;Box style={{ background: '#0E9B78', borderRadius: 5, padding: '3px 11px' }}&gt;&#13;&#10;            &lt;Text style={{ fontSize: 14, fontWeight: 'bold', color: '#FFFFFF' }}&gt;第 15 节&lt;/Text&gt;&#13;&#10;        &lt;/Box&gt;&#13;&#10;        &lt;Text style={{ fontSize: 30, fontWeight: 'bold', color: '#16232E' }}&gt;核心知识点&lt;/Text&gt;&#13;&#10;        &lt;Text style={{ fontSize: 15, color: '#5A6B7A', marginTop: 10 }}&gt;· range() 与列表推导式&lt;/Text&gt;&#13;&#10;    &lt;/Box&gt;&#13;&#10;    &lt;Box style={{ position: 'absolute', left: 0, top: 0, width: '1280px', height: '720px' }}&gt;&#13;&#10;        &lt;svg width='1280' height='720' viewBox='0 0 1280 720'&gt;&#13;&#10;            &lt;rect x='64' y='96' width='548' height='330' rx='12' fill='#FFFFFF' stroke='#D8E3EE' /&gt;&lt;rect x='64' y='96' width='548' height='4' rx='2' fill='#1F5FA8' /&gt;&lt;text x='82' y='130' fontSize='15.5' fontWeight='bold' fill='#1F5FA8' textAnchor='start' fontFamily='Microsoft YaHei'&gt;2.3 循环的常见搭档&lt;/text&gt;&lt;text x='82' y='169.0' fontSize='13' fill='#3A4A58' textAnchor='start' fontFamily='Microsoft YaHei'&gt;· for i in range(1, 10, 2):&lt;/text&gt;&lt;rect x='668' y='96' width='548' height='330' rx='12' fill='#FFFFFF' stroke='#D8E3EE' /&gt;&lt;rect x='668' y='96' width='548' height='4' rx='2' fill='#1F5FA8' /&gt;&lt;text x='686' y='130' fontSize='15.5' fontWeight='bold' fill='#1F5FA8' textAnchor='start' fontFamily='Microsoft YaHei'&gt;2.4 列表推导式：一行搞定筛选&lt;/text&gt;&lt;text x='686' y='169.0' fontSize='13' fill='#3A4A58' textAnchor='start' fontFamily='Microsoft YaHei'&gt;· 什么时候用推导式：处理单个元素、产出单个值时最清晰。&lt;/text&gt;&lt;text x='686' y='197.5' fontSize='13' fill='#3A4A58' textAnchor='start' fontFamily='Microsoft YaHei'&gt;· 什么时候不用：需要多步中间变量、需要 break、或者嵌套超过两层时，强行用推导式&lt;/text&gt;&lt;text x='686' y='217.0' fontSize='13' fill='#3A4A58' textAnchor='start' fontFamily='Microsoft YaHei'&gt;会写出没人看得懂的代…&lt;/text&gt;&lt;rect x='64' y='574' width='1152' height='66' rx='12' fill='#EEF5FB' /&gt;&lt;text x='84' y='616' fontSize='14' fill='#243444' textAnchor='start' fontFamily='Microsoft YaHei'&gt;看不懂的地方先回讲义对应小节读一遍，再回来对着这页复述一次——能讲出来才算真懂。&lt;/text&gt;&#13;&#10;            &lt;text x='64' y='684' fontSize='13' fill='#8A9AAA' fontFamily='Microsoft YaHei'&gt;Python 讲授课件 · 逐节版&lt;/text&gt;&#13;&#10;            &lt;text x='1216' y='684' fontSize='13' fill='#8A9AAA' textAnchor='end' fontFamily='Microsoft YaHei'&gt;单元 3 · 第 15 节&lt;/text&gt;&#13;&#10;        &lt;/svg&gt;&#13;&#10;    &lt;/Box&gt;&#13;&#10;&lt;/Slide&gt;&#13;&#10;"/>
+        <p:cNvPr id="55" name="" descr="&lt;Slide style={{ width: '1280px', height: '720px', backgroundColor: '#FAFCFE', padding: 0, position: 'relative', overflow: 'hidden' }}&gt;&#13;&#10;    &lt;Box style={{ position: 'absolute', left: 64, top: 36, width: '1152px', flexDirection: 'row', alignItems: 'center', gap: 12 }}&gt;&#13;&#10;        &lt;Box style={{ background: '#0E9B78', borderRadius: 5, padding: '3px 11px' }}&gt;&#13;&#10;            &lt;Text style={{ fontSize: 14, fontWeight: 'bold', color: '#FFFFFF' }}&gt;第 15 节&lt;/Text&gt;&#13;&#10;        &lt;/Box&gt;&#13;&#10;        &lt;Text style={{ fontSize: 30, fontWeight: 'bold', color: '#16232E' }}&gt;核心知识点&lt;/Text&gt;&#13;&#10;        &lt;Text style={{ fontSize: 15, color: '#5A6B7A', marginTop: 10 }}&gt;· range() 与列表推导式&lt;/Text&gt;&#13;&#10;    &lt;/Box&gt;&#13;&#10;    &lt;Box style={{ position: 'absolute', left: 0, top: 0, width: '1280px', height: '720px' }}&gt;&#13;&#10;        &lt;svg width='1280' height='720' viewBox='0 0 1280 720'&gt;&#13;&#10;            &lt;rect x='64' y='96' width='548' height='330' rx='12' fill='#FFFFFF' stroke='#D8E3EE' /&gt;&lt;rect x='64' y='96' width='548' height='4' rx='2' fill='#1F5FA8' /&gt;&lt;text x='82' y='130' fontSize='15.5' fontWeight='bold' fill='#1F5FA8' textAnchor='start' fontFamily='Microsoft YaHei'&gt;2.3 循环的常见搭档&lt;/text&gt;&lt;text x='82' y='169.0' fontSize='13' fill='#3A4A58' textAnchor='start' fontFamily='Microsoft YaHei'&gt;· for i in range(1, 10, 2):&lt;/text&gt;&lt;rect x='668' y='96' width='548' height='330' rx='12' fill='#FFFFFF' stroke='#D8E3EE' /&gt;&lt;rect x='668' y='96' width='548' height='4' rx='2' fill='#1F5FA8' /&gt;&lt;text x='686' y='130' fontSize='15.5' fontWeight='bold' fill='#1F5FA8' textAnchor='start' fontFamily='Microsoft YaHei'&gt;2.4 列表推导式：一行搞定筛选&lt;/text&gt;&lt;text x='686' y='169.0' fontSize='13' fill='#3A4A58' textAnchor='start' fontFamily='Microsoft YaHei'&gt;· 什么时候用推导式&lt;/text&gt;&lt;text x='686' y='197.5' fontSize='13' fill='#3A4A58' textAnchor='start' fontFamily='Microsoft YaHei'&gt;· 什么时候不用&lt;/text&gt;&lt;rect x='64' y='574' width='1152' height='66' rx='12' fill='#EEF5FB' /&gt;&lt;text x='84' y='616' fontSize='14' fill='#243444' textAnchor='start' fontFamily='Microsoft YaHei'&gt;看不懂的地方先回讲义对应小节读一遍，再回来对着这页复述一次——能讲出来才算真懂。&lt;/text&gt;&#13;&#10;            &lt;text x='64' y='684' fontSize='13' fill='#8A9AAA' fontFamily='Microsoft YaHei'&gt;Python 讲授课件 · 逐节版&lt;/text&gt;&#13;&#10;            &lt;text x='1216' y='684' fontSize='13' fill='#8A9AAA' textAnchor='end' fontFamily='Microsoft YaHei'&gt;单元 3 · 第 15 节&lt;/text&gt;&#13;&#10;        &lt;/svg&gt;&#13;&#10;    &lt;/Box&gt;&#13;&#10;&lt;/Slide&gt;&#13;&#10;"/>
         <p:cNvGrpSpPr/>
         <p:nvPr/>
       </p:nvGrpSpPr>
@@ -3032,7 +3032,7 @@
   <p:cSld>
     <p:spTree>
       <p:nvGrpSpPr>
-        <p:cNvPr id="68" name="" descr="&lt;Slide style={{ width: '1280px', height: '720px', backgroundColor: '#FAFCFE', padding: 0, position: 'relative', overflow: 'hidden' }}&gt;&#13;&#10;    &lt;Box style={{ position: 'absolute', left: 64, top: 36, width: '1152px', flexDirection: 'row', alignItems: 'center', gap: 12 }}&gt;&#13;&#10;        &lt;Box style={{ background: '#0E9B78', borderRadius: 5, padding: '3px 11px' }}&gt;&#13;&#10;            &lt;Text style={{ fontSize: 14, fontWeight: 'bold', color: '#FFFFFF' }}&gt;第 16 节&lt;/Text&gt;&#13;&#10;        &lt;/Box&gt;&#13;&#10;        &lt;Text style={{ fontSize: 30, fontWeight: 'bold', color: '#16232E' }}&gt;核心知识点&lt;/Text&gt;&#13;&#10;        &lt;Text style={{ fontSize: 15, color: '#5A6B7A', marginTop: 10 }}&gt;· 切片、元组与 PEP 8 排版&lt;/Text&gt;&#13;&#10;    &lt;/Box&gt;&#13;&#10;    &lt;Box style={{ position: 'absolute', left: 0, top: 0, width: '1280px', height: '720px' }}&gt;&#13;&#10;        &lt;svg width='1280' height='720' viewBox='0 0 1280 720'&gt;&#13;&#10;            &lt;rect x='64' y='96' width='368' height='330' rx='12' fill='#FFFFFF' stroke='#D8E3EE' /&gt;&lt;rect x='64' y='96' width='368' height='4' rx='2' fill='#1F5FA8' /&gt;&lt;text x='82' y='130' fontSize='15.5' fontWeight='bold' fill='#1F5FA8' textAnchor='start' fontFamily='Microsoft YaHei'&gt;2.5 切片：一次取出一段&lt;/text&gt;&lt;text x='82' y='169.0' fontSize='13' fill='#3A4A58' textAnchor='start' fontFamily='Microsoft YaHei'&gt;· 切片也是浅拷贝：a[:] 得到新列表，但里面的元素还是&lt;/text&gt;&lt;text x='82' y='188.5' fontSize='13' fill='#3A4A58' textAnchor='start' fontFamily='Microsoft YaHei'&gt;同一批对象（嵌套列表时要注意）。&lt;/text&gt;&lt;rect x='468' y='96' width='368' height='330' rx='12' fill='#FFFFFF' stroke='#D8E3EE' /&gt;&lt;rect x='468' y='96' width='368' height='4' rx='2' fill='#1F5FA8' /&gt;&lt;text x='486' y='130' fontSize='15.5' fontWeight='bold' fill='#1F5FA8' textAnchor='start' fontFamily='Microsoft YaHei'&gt;2.6 元组：用括号表示&quot;不可修改&quot;&lt;/text&gt;&lt;text x='486' y='169.0' fontSize='13' fill='#3A4A58' textAnchor='start' fontFamily='Microsoft YaHei'&gt;· 只有一个元素的元组必须写逗号——这是超级高频的坑：&lt;/text&gt;&lt;text x='486' y='197.5' fontSize='13' fill='#3A4A58' textAnchor='start' fontFamily='Microsoft YaHei'&gt;· 为什么字典的键要用元组这类不可变类型：键必须是&quot;不&lt;/text&gt;&lt;text x='486' y='217.0' fontSize='13' fill='#3A4A58' textAnchor='start' fontFamily='Microsoft YaHei'&gt;会变的&quot;，否则你把键改了，就再也找不到对应的值了。&lt;/text&gt;&lt;text x='486' y='236.5' fontSize='13' fill='#3A4A58' textAnchor='start' fontFamily='Microsoft YaHei'&gt;列…&lt;/text&gt;&lt;rect x='872' y='96' width='368' height='330' rx='12' fill='#FFFFFF' stroke='#D8E3EE' /&gt;&lt;rect x='872' y='96' width='368' height='4' rx='2' fill='#1F5FA8' /&gt;&lt;text x='890' y='130' fontSize='15.5' fontWeight='bold' fill='#1F5FA8' textAnchor='start' fontFamily='Microsoft YaHei'&gt;2.7 PEP 8：让代码能被人读&lt;/text&gt;&lt;text x='890' y='169.0' fontSize='13' fill='#3A4A58' textAnchor='start' fontFamily='Microsoft YaHei'&gt;· PEP 8 是 Python 官方风格指南，与功能无关但直接影&lt;/text&gt;&lt;text x='890' y='188.5' fontSize='13' fill='#3A4A58' textAnchor='start' fontFamily='Microsoft YaHei'&gt;响你能不能维护自己的代码。核心三条：&lt;/text&gt;&lt;text x='64' y='470' fontSize='14.5' fontWeight='bold' fill='#0E9B78' textAnchor='start' fontFamily='Microsoft YaHei'&gt;本节的代码示例&lt;/text&gt;&lt;text x='64' y='500' fontSize='13' fill='#3A4A58' textAnchor='start' fontFamily='Microsoft YaHei'&gt;· for 循环基础&lt;/text&gt;&lt;text x='468' y='500' fontSize='13' fill='#3A4A58' textAnchor='start' fontFamily='Microsoft YaHei'&gt;· range 的四种形式&lt;/text&gt;&lt;text x='872' y='500' fontSize='13' fill='#3A4A58' textAnchor='start' fontFamily='Microsoft YaHei'&gt;· 常见循环搭档&lt;/text&gt;&lt;rect x='64' y='574' width='1152' height='66' rx='12' fill='#EEF5FB' /&gt;&lt;text x='84' y='616' fontSize='14' fill='#243444' textAnchor='start' fontFamily='Microsoft YaHei'&gt;看不懂的地方先回讲义对应小节读一遍，再回来对着这页复述一次——能讲出来才算真懂。&lt;/text&gt;&#13;&#10;            &lt;text x='64' y='684' fontSize='13' fill='#8A9AAA' fontFamily='Microsoft YaHei'&gt;Python 讲授课件 · 逐节版&lt;/text&gt;&#13;&#10;            &lt;text x='1216' y='684' fontSize='13' fill='#8A9AAA' textAnchor='end' fontFamily='Microsoft YaHei'&gt;单元 3 · 第 16 节&lt;/text&gt;&#13;&#10;        &lt;/svg&gt;&#13;&#10;    &lt;/Box&gt;&#13;&#10;&lt;/Slide&gt;&#13;&#10;"/>
+        <p:cNvPr id="68" name="" descr="&lt;Slide style={{ width: '1280px', height: '720px', backgroundColor: '#FAFCFE', padding: 0, position: 'relative', overflow: 'hidden' }}&gt;&#13;&#10;    &lt;Box style={{ position: 'absolute', left: 64, top: 36, width: '1152px', flexDirection: 'row', alignItems: 'center', gap: 12 }}&gt;&#13;&#10;        &lt;Box style={{ background: '#0E9B78', borderRadius: 5, padding: '3px 11px' }}&gt;&#13;&#10;            &lt;Text style={{ fontSize: 14, fontWeight: 'bold', color: '#FFFFFF' }}&gt;第 16 节&lt;/Text&gt;&#13;&#10;        &lt;/Box&gt;&#13;&#10;        &lt;Text style={{ fontSize: 30, fontWeight: 'bold', color: '#16232E' }}&gt;核心知识点&lt;/Text&gt;&#13;&#10;        &lt;Text style={{ fontSize: 15, color: '#5A6B7A', marginTop: 10 }}&gt;· 切片、元组与 PEP 8 排版&lt;/Text&gt;&#13;&#10;    &lt;/Box&gt;&#13;&#10;    &lt;Box style={{ position: 'absolute', left: 0, top: 0, width: '1280px', height: '720px' }}&gt;&#13;&#10;        &lt;svg width='1280' height='720' viewBox='0 0 1280 720'&gt;&#13;&#10;            &lt;rect x='64' y='96' width='368' height='330' rx='12' fill='#FFFFFF' stroke='#D8E3EE' /&gt;&lt;rect x='64' y='96' width='368' height='4' rx='2' fill='#1F5FA8' /&gt;&lt;text x='82' y='130' fontSize='15.5' fontWeight='bold' fill='#1F5FA8' textAnchor='start' fontFamily='Microsoft YaHei'&gt;2.5 切片：一次取出一段&lt;/text&gt;&lt;text x='82' y='169.0' fontSize='13' fill='#3A4A58' textAnchor='start' fontFamily='Microsoft YaHei'&gt;· 切片也是浅拷贝&lt;/text&gt;&lt;rect x='468' y='96' width='368' height='330' rx='12' fill='#FFFFFF' stroke='#D8E3EE' /&gt;&lt;rect x='468' y='96' width='368' height='4' rx='2' fill='#1F5FA8' /&gt;&lt;text x='486' y='130' fontSize='15.5' fontWeight='bold' fill='#1F5FA8' textAnchor='start' fontFamily='Microsoft YaHei'&gt;2.6 元组：用括号表示&quot;不可修改&quot;&lt;/text&gt;&lt;text x='486' y='169.0' fontSize='13' fill='#3A4A58' textAnchor='start' fontFamily='Microsoft YaHei'&gt;· 只有一个元素的元组必须写逗号&lt;/text&gt;&lt;text x='486' y='197.5' fontSize='13' fill='#3A4A58' textAnchor='start' fontFamily='Microsoft YaHei'&gt;· 为什么字典的键要用元组这类不可变类型&lt;/text&gt;&lt;rect x='872' y='96' width='368' height='330' rx='12' fill='#FFFFFF' stroke='#D8E3EE' /&gt;&lt;rect x='872' y='96' width='368' height='4' rx='2' fill='#1F5FA8' /&gt;&lt;text x='890' y='130' fontSize='15.5' fontWeight='bold' fill='#1F5FA8' textAnchor='start' fontFamily='Microsoft YaHei'&gt;2.7 PEP 8：让代码能被人读&lt;/text&gt;&lt;text x='890' y='169.0' fontSize='13' fill='#3A4A58' textAnchor='start' fontFamily='Microsoft YaHei'&gt;· PEP 8 是 Python 官方风格指南，&lt;/text&gt;&lt;text x='890' y='188.5' fontSize='13' fill='#3A4A58' textAnchor='start' fontFamily='Microsoft YaHei'&gt;与功能无关但直接影响你能不能维护自己的代码。&lt;/text&gt;&lt;text x='64' y='470' fontSize='14.5' fontWeight='bold' fill='#0E9B78' textAnchor='start' fontFamily='Microsoft YaHei'&gt;本节的代码示例&lt;/text&gt;&lt;text x='64' y='500' fontSize='13' fill='#3A4A58' textAnchor='start' fontFamily='Microsoft YaHei'&gt;· for 循环基础&lt;/text&gt;&lt;text x='468' y='500' fontSize='13' fill='#3A4A58' textAnchor='start' fontFamily='Microsoft YaHei'&gt;· range 的四种形式&lt;/text&gt;&lt;text x='872' y='500' fontSize='13' fill='#3A4A58' textAnchor='start' fontFamily='Microsoft YaHei'&gt;· 常见循环搭档&lt;/text&gt;&lt;rect x='64' y='574' width='1152' height='66' rx='12' fill='#EEF5FB' /&gt;&lt;text x='84' y='616' fontSize='14' fill='#243444' textAnchor='start' fontFamily='Microsoft YaHei'&gt;看不懂的地方先回讲义对应小节读一遍，再回来对着这页复述一次——能讲出来才算真懂。&lt;/text&gt;&#13;&#10;            &lt;text x='64' y='684' fontSize='13' fill='#8A9AAA' fontFamily='Microsoft YaHei'&gt;Python 讲授课件 · 逐节版&lt;/text&gt;&#13;&#10;            &lt;text x='1216' y='684' fontSize='13' fill='#8A9AAA' textAnchor='end' fontFamily='Microsoft YaHei'&gt;单元 3 · 第 16 节&lt;/text&gt;&#13;&#10;        &lt;/svg&gt;&#13;&#10;    &lt;/Box&gt;&#13;&#10;&lt;/Slide&gt;&#13;&#10;"/>
         <p:cNvGrpSpPr/>
         <p:nvPr/>
       </p:nvGrpSpPr>

--- a/python-course-ppt/逐节课件/Python讲授课件-单元03.pptx
+++ b/python-course-ppt/逐节课件/Python讲授课件-单元03.pptx
@@ -555,7 +555,7 @@
   <p:cSld>
     <p:spTree>
       <p:nvGrpSpPr>
-        <p:cNvPr id="1" name="" descr="&lt;Slide style={{ width: '1280px', height: '720px', backgroundColor: '#FAFCFE', padding: 0, position: 'relative', overflow: 'hidden' }}&gt;&#13;&#10;    &lt;Box style={{ position: 'absolute', left: 0, top: 0, width: '1280px', height: '150px', background: '#1F5FA8' }} /&gt;&#13;&#10;    &lt;Box style={{ position: 'absolute', left: 64, top: 34, width: '1152px', flexDirection: 'column' }}&gt;&#13;&#10;        &lt;Text style={{ fontSize: 15, fontWeight: 'bold', color: '#BFD9F2', letterSpacing: 2 }}&gt;阶段 1 · 单元 3&lt;/Text&gt;&#13;&#10;        &lt;Text style={{ fontSize: 38, fontWeight: 'bold', color: '#FFFFFF', marginTop: 6 }}&gt;操作列表&lt;/Text&gt;&#13;&#10;    &lt;/Box&gt;&#13;&#10;    &lt;Box style={{ position: 'absolute', left: 64, top: 168, width: '1152px', height: 470 }}&gt;&#13;&#10;        &lt;svg width='1152' height='470' viewBox='0 0 1152 470'&gt;&#13;&#10;            &lt;text x='0' y='18' fontSize='15' fontWeight='bold' fill='#16232E' fontFamily='Microsoft YaHei'&gt;本单元共 5 节课&lt;/text&gt;&#13;&#10;            &lt;rect x='0' y='196' width='1152' height='38' rx='7' fill='#FFFFFF' /&gt;&lt;text x='16' y='221' fontSize='15' fontWeight='bold' fill='#1F5FA8' fontFamily='Microsoft YaHei'&gt;第 14 节&lt;/text&gt;&lt;text x='96' y='221' fontSize='15' fill='#16232E' fontFamily='Microsoft YaHei'&gt;for 循环：把重复交给机器&lt;/text&gt;&lt;text x='1080' y='221' fontSize='13' fill='#5A6B7A' textAnchor='end' fontFamily='Microsoft YaHei'&gt;W3&lt;/text&gt;&lt;rect x='0' y='238' width='1152' height='38' rx='7' fill='#F2F7FD' /&gt;&lt;text x='16' y='263' fontSize='15' fontWeight='bold' fill='#1F5FA8' fontFamily='Microsoft YaHei'&gt;第 15 节&lt;/text&gt;&lt;text x='96' y='263' fontSize='15' fill='#16232E' fontFamily='Microsoft YaHei'&gt;range() 与列表推导式&lt;/text&gt;&lt;text x='1080' y='263' fontSize='13' fill='#5A6B7A' textAnchor='end' fontFamily='Microsoft YaHei'&gt;W3&lt;/text&gt;&lt;rect x='0' y='280' width='1152' height='38' rx='7' fill='#FFFFFF' /&gt;&lt;text x='16' y='305' fontSize='15' fontWeight='bold' fill='#1F5FA8' fontFamily='Microsoft YaHei'&gt;第 16 节&lt;/text&gt;&lt;text x='96' y='305' fontSize='15' fill='#16232E' fontFamily='Microsoft YaHei'&gt;切片、元组与 PEP 8 排版&lt;/text&gt;&lt;text x='1080' y='305' fontSize='13' fill='#5A6B7A' textAnchor='end' fontFamily='Microsoft YaHei'&gt;W3&lt;/text&gt;&lt;rect x='0' y='322' width='1152' height='38' rx='7' fill='#F2F7FD' /&gt;&lt;text x='16' y='347' fontSize='15' fontWeight='bold' fill='#1F5FA8' fontFamily='Microsoft YaHei'&gt;第 17 节&lt;/text&gt;&lt;text x='96' y='347' fontSize='15' fill='#16232E' fontFamily='Microsoft YaHei'&gt;动手实战与答案讲评&lt;/text&gt;&lt;text x='1080' y='347' fontSize='13' fill='#5A6B7A' textAnchor='end' fontFamily='Microsoft YaHei'&gt;W3&lt;/text&gt;&lt;rect x='0' y='364' width='1152' height='38' rx='7' fill='#FFFFFF' /&gt;&lt;text x='16' y='389' fontSize='15' fontWeight='bold' fill='#1F5FA8' fontFamily='Microsoft YaHei'&gt;第 18 节&lt;/text&gt;&lt;text x='96' y='389' fontSize='15' fill='#16232E' fontFamily='Microsoft YaHei'&gt;单元 3 验收复盘&lt;/text&gt;&lt;text x='1080' y='389' fontSize='13' fill='#5A6B7A' textAnchor='end' fontFamily='Microsoft YaHei'&gt;W3&lt;/text&gt;&#13;&#10;        &lt;/svg&gt;&#13;&#10;    &lt;/Box&gt;&#13;&#10;    &lt;Box style={{ position: 'absolute', left: 64, bottom: 22, width: '1152px', flexDirection: 'row', justifyContent: 'space-between' }}&gt;&#13;&#10;        &lt;Text style={{ fontSize: 13, color: '#8A9AAA' }}&gt;Python 讲授课件 · 逐节版&lt;/Text&gt;&#13;&#10;        &lt;Text style={{ fontSize: 13, color: '#8A9AAA' }}&gt;单元 3 · 封面&lt;/Text&gt;&#13;&#10;    &lt;/Box&gt;&#13;&#10;&lt;/Slide&gt;&#13;&#10;"/>
+        <p:cNvPr id="1" name="" descr="&lt;Slide style={{ width: '1280px', height: '720px', backgroundColor: '#FAFCFE', padding: 0, position: 'relative', overflow: 'hidden' }}&gt;&#13;&#10;    &lt;Box style={{ position: 'absolute', left: 0, top: 0, width: '1280px', height: '150px', background: '#1F5FA8' }} /&gt;&#13;&#10;    &lt;Box style={{ position: 'absolute', left: 64, top: 34, width: '1152px', flexDirection: 'column' }}&gt;&#13;&#10;        &lt;Text style={{ fontSize: 15, fontWeight: 'bold', color: '#BFD9F2', letterSpacing: 2 }}&gt;阶段 1 · 单元 3&lt;/Text&gt;&#13;&#10;        &lt;Text style={{ fontSize: 38, fontWeight: 'bold', color: '#FFFFFF', marginTop: 6 }}&gt;操作列表&lt;/Text&gt;&#13;&#10;    &lt;/Box&gt;&#13;&#10;    &lt;Box style={{ position: 'absolute', left: 64, top: 168, width: '1152px', height: 470 }}&gt;&#13;&#10;        &lt;svg width='1152' height='470' viewBox='0 0 1152 470'&gt;&#13;&#10;            &lt;text x='0' y='18' fontSize='15' fontWeight='bold' fill='#16232E' fontFamily='Microsoft YaHei'&gt;本单元共 5 节课&lt;/text&gt;&#13;&#10;            &lt;rect x='0' y='56.0' width='1152' height='48.0' rx='7' fill='#FFFFFF' /&gt;&lt;text x='16' y='85.0' fontSize='15' fontWeight='bold' fill='#1F5FA8' fontFamily='Microsoft YaHei'&gt;第 14 节&lt;/text&gt;&lt;text x='96' y='85.0' fontSize='15' fill='#16232E' fontFamily='Microsoft YaHei'&gt;for 循环：把重复交给机器&lt;/text&gt;&lt;text x='1080' y='85.0' fontSize='13' fill='#5A6B7A' textAnchor='end' fontFamily='Microsoft YaHei'&gt;W3&lt;/text&gt;&lt;rect x='0' y='135.2' width='1152' height='48.0' rx='7' fill='#F2F7FD' /&gt;&lt;text x='16' y='164.2' fontSize='15' fontWeight='bold' fill='#1F5FA8' fontFamily='Microsoft YaHei'&gt;第 15 节&lt;/text&gt;&lt;text x='96' y='164.2' fontSize='15' fill='#16232E' fontFamily='Microsoft YaHei'&gt;range() 与列表推导式&lt;/text&gt;&lt;text x='1080' y='164.2' fontSize='13' fill='#5A6B7A' textAnchor='end' fontFamily='Microsoft YaHei'&gt;W3&lt;/text&gt;&lt;rect x='0' y='214.4' width='1152' height='48.0' rx='7' fill='#FFFFFF' /&gt;&lt;text x='16' y='243.4' fontSize='15' fontWeight='bold' fill='#1F5FA8' fontFamily='Microsoft YaHei'&gt;第 16 节&lt;/text&gt;&lt;text x='96' y='243.4' fontSize='15' fill='#16232E' fontFamily='Microsoft YaHei'&gt;切片、元组与 PEP 8 排版&lt;/text&gt;&lt;text x='1080' y='243.4' fontSize='13' fill='#5A6B7A' textAnchor='end' fontFamily='Microsoft YaHei'&gt;W3&lt;/text&gt;&lt;rect x='0' y='293.6' width='1152' height='48.0' rx='7' fill='#F2F7FD' /&gt;&lt;text x='16' y='322.6' fontSize='15' fontWeight='bold' fill='#1F5FA8' fontFamily='Microsoft YaHei'&gt;第 17 节&lt;/text&gt;&lt;text x='96' y='322.6' fontSize='15' fill='#16232E' fontFamily='Microsoft YaHei'&gt;动手实战与答案讲评&lt;/text&gt;&lt;text x='1080' y='322.6' fontSize='13' fill='#5A6B7A' textAnchor='end' fontFamily='Microsoft YaHei'&gt;W3&lt;/text&gt;&lt;rect x='0' y='372.8' width='1152' height='48.0' rx='7' fill='#FFFFFF' /&gt;&lt;text x='16' y='401.8' fontSize='15' fontWeight='bold' fill='#1F5FA8' fontFamily='Microsoft YaHei'&gt;第 18 节&lt;/text&gt;&lt;text x='96' y='401.8' fontSize='15' fill='#16232E' fontFamily='Microsoft YaHei'&gt;单元 3 验收复盘&lt;/text&gt;&lt;text x='1080' y='401.8' fontSize='13' fill='#5A6B7A' textAnchor='end' fontFamily='Microsoft YaHei'&gt;W3&lt;/text&gt;&#13;&#10;        &lt;/svg&gt;&#13;&#10;    &lt;/Box&gt;&#13;&#10;    &lt;Box style={{ position: 'absolute', left: 64, bottom: 22, width: '1152px', flexDirection: 'row', justifyContent: 'space-between' }}&gt;&#13;&#10;        &lt;Text style={{ fontSize: 13, color: '#8A9AAA' }}&gt;Python 讲授课件 · 逐节版&lt;/Text&gt;&#13;&#10;        &lt;Text style={{ fontSize: 13, color: '#8A9AAA' }}&gt;单元 3 · 封面&lt;/Text&gt;&#13;&#10;    &lt;/Box&gt;&#13;&#10;&lt;/Slide&gt;&#13;&#10;"/>
         <p:cNvGrpSpPr/>
         <p:nvPr/>
       </p:nvGrpSpPr>
@@ -2140,7 +2140,7 @@
   <p:cSld>
     <p:spTree>
       <p:nvGrpSpPr>
-        <p:cNvPr id="42" name="" descr="&lt;Slide style={{ width: '1280px', height: '720px', backgroundColor: '#FAFCFE', padding: 0, position: 'relative', overflow: 'hidden' }}&gt;&#13;&#10;    &lt;Box style={{ position: 'absolute', left: 64, top: 36, width: '1152px', flexDirection: 'row', alignItems: 'center', gap: 12 }}&gt;&#13;&#10;        &lt;Box style={{ background: '#0E9B78', borderRadius: 5, padding: '3px 11px' }}&gt;&#13;&#10;            &lt;Text style={{ fontSize: 14, fontWeight: 'bold', color: '#FFFFFF' }}&gt;第 14 节&lt;/Text&gt;&#13;&#10;        &lt;/Box&gt;&#13;&#10;        &lt;Text style={{ fontSize: 30, fontWeight: 'bold', color: '#16232E' }}&gt;核心知识点&lt;/Text&gt;&#13;&#10;        &lt;Text style={{ fontSize: 15, color: '#5A6B7A', marginTop: 10 }}&gt;· for 循环：把重复交给机器&lt;/Text&gt;&#13;&#10;    &lt;/Box&gt;&#13;&#10;    &lt;Box style={{ position: 'absolute', left: 0, top: 0, width: '1280px', height: '720px' }}&gt;&#13;&#10;        &lt;svg width='1280' height='720' viewBox='0 0 1280 720'&gt;&#13;&#10;            &lt;rect x='64' y='96' width='548' height='330' rx='12' fill='#FFFFFF' stroke='#D8E3EE' /&gt;&lt;rect x='64' y='96' width='548' height='4' rx='2' fill='#1F5FA8' /&gt;&lt;text x='82' y='130' fontSize='15.5' fontWeight='bold' fill='#1F5FA8' textAnchor='start' fontFamily='Microsoft YaHei'&gt;2.1 for 循环：把重复交给机器&lt;/text&gt;&lt;text x='82' y='169.0' fontSize='13' fill='#3A4A58' textAnchor='start' fontFamily='Microsoft YaHei'&gt;· 最关键的陷阱：缩进决定循环体。&lt;/text&gt;&lt;rect x='668' y='96' width='548' height='330' rx='12' fill='#FFFFFF' stroke='#D8E3EE' /&gt;&lt;rect x='668' y='96' width='548' height='4' rx='2' fill='#1F5FA8' /&gt;&lt;text x='686' y='130' fontSize='15.5' fontWeight='bold' fill='#1F5FA8' textAnchor='start' fontFamily='Microsoft YaHei'&gt;2.2 range()：造出一串数字&lt;/text&gt;&lt;text x='686' y='169.0' fontSize='13' fill='#3A4A58' textAnchor='start' fontFamily='Microsoft YaHei'&gt;· 有时我们还没有列表，只想&quot;重复 N 次&quot;，这时用 range()：&lt;/text&gt;&lt;rect x='64' y='574' width='1152' height='66' rx='12' fill='#EEF5FB' /&gt;&lt;text x='84' y='616' fontSize='14' fill='#243444' textAnchor='start' fontFamily='Microsoft YaHei'&gt;看不懂的地方先回讲义对应小节读一遍，再回来对着这页复述一次——能讲出来才算真懂。&lt;/text&gt;&#13;&#10;            &lt;text x='64' y='684' fontSize='13' fill='#8A9AAA' fontFamily='Microsoft YaHei'&gt;Python 讲授课件 · 逐节版&lt;/text&gt;&#13;&#10;            &lt;text x='1216' y='684' fontSize='13' fill='#8A9AAA' textAnchor='end' fontFamily='Microsoft YaHei'&gt;单元 3 · 第 14 节&lt;/text&gt;&#13;&#10;        &lt;/svg&gt;&#13;&#10;    &lt;/Box&gt;&#13;&#10;&lt;/Slide&gt;&#13;&#10;"/>
+        <p:cNvPr id="42" name="" descr="&lt;Slide style={{ width: '1280px', height: '720px', backgroundColor: '#FAFCFE', padding: 0, position: 'relative', overflow: 'hidden' }}&gt;&#13;&#10;    &lt;Box style={{ position: 'absolute', left: 64, top: 36, width: '1152px', flexDirection: 'row', alignItems: 'center', gap: 12 }}&gt;&#13;&#10;        &lt;Box style={{ background: '#0E9B78', borderRadius: 5, padding: '3px 11px' }}&gt;&#13;&#10;            &lt;Text style={{ fontSize: 14, fontWeight: 'bold', color: '#FFFFFF' }}&gt;第 14 节&lt;/Text&gt;&#13;&#10;        &lt;/Box&gt;&#13;&#10;        &lt;Text style={{ fontSize: 30, fontWeight: 'bold', color: '#16232E' }}&gt;核心知识点&lt;/Text&gt;&#13;&#10;        &lt;Text style={{ fontSize: 15, color: '#5A6B7A', marginTop: 10 }}&gt;· for 循环：把重复交给机器&lt;/Text&gt;&#13;&#10;    &lt;/Box&gt;&#13;&#10;    &lt;Box style={{ position: 'absolute', left: 0, top: 0, width: '1280px', height: '720px' }}&gt;&#13;&#10;        &lt;svg width='1280' height='720' viewBox='0 0 1280 720'&gt;&#13;&#10;            &lt;rect x='64' y='96' width='548' height='330' rx='12' fill='#FFFFFF' stroke='#D8E3EE' /&gt;&lt;rect x='64' y='96' width='548' height='4' rx='2' fill='#1F5FA8' /&gt;&lt;text x='82' y='130' fontSize='15.5' fontWeight='bold' fill='#1F5FA8' textAnchor='start' fontFamily='Microsoft YaHei'&gt;2.1 for 循环：把重复交给机器&lt;/text&gt;&lt;text x='82' y='169.0' fontSize='13' fill='#3A4A58' textAnchor='start' fontFamily='Microsoft YaHei'&gt;· 最关键的陷阱：缩进决定循环体。&lt;/text&gt;&lt;rect x='668' y='96' width='548' height='330' rx='12' fill='#FFFFFF' stroke='#D8E3EE' /&gt;&lt;rect x='668' y='96' width='548' height='4' rx='2' fill='#1F5FA8' /&gt;&lt;text x='686' y='130' fontSize='15.5' fontWeight='bold' fill='#1F5FA8' textAnchor='start' fontFamily='Microsoft YaHei'&gt;2.2 range()：造出一串数字&lt;/text&gt;&lt;text x='686' y='169.0' fontSize='13' fill='#3A4A58' textAnchor='start' fontFamily='Microsoft YaHei'&gt;· 1. 含起点，不含终点（左闭右开）&lt;/text&gt;&lt;text x='686' y='197.5' fontSize='13' fill='#3A4A58' textAnchor='start' fontFamily='Microsoft YaHei'&gt;· 2. 只有一个参数时 = range(0, 参数)&lt;/text&gt;&lt;text x='686' y='226.0' fontSize='13' fill='#3A4A58' textAnchor='start' fontFamily='Microsoft YaHei'&gt;· 3. 步长的符号决定方向&lt;/text&gt;&lt;rect x='64' y='574' width='1152' height='66' rx='12' fill='#EEF5FB' /&gt;&lt;text x='84' y='616' fontSize='14' fill='#243444' textAnchor='start' fontFamily='Microsoft YaHei'&gt;看不懂的地方先回讲义对应小节读一遍，再回来对着这页复述一次——能讲出来才算真懂。&lt;/text&gt;&#13;&#10;            &lt;text x='64' y='684' fontSize='13' fill='#8A9AAA' fontFamily='Microsoft YaHei'&gt;Python 讲授课件 · 逐节版&lt;/text&gt;&#13;&#10;            &lt;text x='1216' y='684' fontSize='13' fill='#8A9AAA' textAnchor='end' fontFamily='Microsoft YaHei'&gt;单元 3 · 第 14 节&lt;/text&gt;&#13;&#10;        &lt;/svg&gt;&#13;&#10;    &lt;/Box&gt;&#13;&#10;&lt;/Slide&gt;&#13;&#10;"/>
         <p:cNvGrpSpPr/>
         <p:nvPr/>
       </p:nvGrpSpPr>
@@ -2581,7 +2581,7 @@
   <p:cSld>
     <p:spTree>
       <p:nvGrpSpPr>
-        <p:cNvPr id="55" name="" descr="&lt;Slide style={{ width: '1280px', height: '720px', backgroundColor: '#FAFCFE', padding: 0, position: 'relative', overflow: 'hidden' }}&gt;&#13;&#10;    &lt;Box style={{ position: 'absolute', left: 64, top: 36, width: '1152px', flexDirection: 'row', alignItems: 'center', gap: 12 }}&gt;&#13;&#10;        &lt;Box style={{ background: '#0E9B78', borderRadius: 5, padding: '3px 11px' }}&gt;&#13;&#10;            &lt;Text style={{ fontSize: 14, fontWeight: 'bold', color: '#FFFFFF' }}&gt;第 15 节&lt;/Text&gt;&#13;&#10;        &lt;/Box&gt;&#13;&#10;        &lt;Text style={{ fontSize: 30, fontWeight: 'bold', color: '#16232E' }}&gt;核心知识点&lt;/Text&gt;&#13;&#10;        &lt;Text style={{ fontSize: 15, color: '#5A6B7A', marginTop: 10 }}&gt;· range() 与列表推导式&lt;/Text&gt;&#13;&#10;    &lt;/Box&gt;&#13;&#10;    &lt;Box style={{ position: 'absolute', left: 0, top: 0, width: '1280px', height: '720px' }}&gt;&#13;&#10;        &lt;svg width='1280' height='720' viewBox='0 0 1280 720'&gt;&#13;&#10;            &lt;rect x='64' y='96' width='548' height='330' rx='12' fill='#FFFFFF' stroke='#D8E3EE' /&gt;&lt;rect x='64' y='96' width='548' height='4' rx='2' fill='#1F5FA8' /&gt;&lt;text x='82' y='130' fontSize='15.5' fontWeight='bold' fill='#1F5FA8' textAnchor='start' fontFamily='Microsoft YaHei'&gt;2.3 循环的常见搭档&lt;/text&gt;&lt;text x='82' y='169.0' fontSize='13' fill='#3A4A58' textAnchor='start' fontFamily='Microsoft YaHei'&gt;· for i in range(1, 10, 2):&lt;/text&gt;&lt;rect x='668' y='96' width='548' height='330' rx='12' fill='#FFFFFF' stroke='#D8E3EE' /&gt;&lt;rect x='668' y='96' width='548' height='4' rx='2' fill='#1F5FA8' /&gt;&lt;text x='686' y='130' fontSize='15.5' fontWeight='bold' fill='#1F5FA8' textAnchor='start' fontFamily='Microsoft YaHei'&gt;2.4 列表推导式：一行搞定筛选&lt;/text&gt;&lt;text x='686' y='169.0' fontSize='13' fill='#3A4A58' textAnchor='start' fontFamily='Microsoft YaHei'&gt;· 什么时候用推导式&lt;/text&gt;&lt;text x='686' y='197.5' fontSize='13' fill='#3A4A58' textAnchor='start' fontFamily='Microsoft YaHei'&gt;· 什么时候不用&lt;/text&gt;&lt;rect x='64' y='574' width='1152' height='66' rx='12' fill='#EEF5FB' /&gt;&lt;text x='84' y='616' fontSize='14' fill='#243444' textAnchor='start' fontFamily='Microsoft YaHei'&gt;看不懂的地方先回讲义对应小节读一遍，再回来对着这页复述一次——能讲出来才算真懂。&lt;/text&gt;&#13;&#10;            &lt;text x='64' y='684' fontSize='13' fill='#8A9AAA' fontFamily='Microsoft YaHei'&gt;Python 讲授课件 · 逐节版&lt;/text&gt;&#13;&#10;            &lt;text x='1216' y='684' fontSize='13' fill='#8A9AAA' textAnchor='end' fontFamily='Microsoft YaHei'&gt;单元 3 · 第 15 节&lt;/text&gt;&#13;&#10;        &lt;/svg&gt;&#13;&#10;    &lt;/Box&gt;&#13;&#10;&lt;/Slide&gt;&#13;&#10;"/>
+        <p:cNvPr id="55" name="" descr="&lt;Slide style={{ width: '1280px', height: '720px', backgroundColor: '#FAFCFE', padding: 0, position: 'relative', overflow: 'hidden' }}&gt;&#13;&#10;    &lt;Box style={{ position: 'absolute', left: 64, top: 36, width: '1152px', flexDirection: 'row', alignItems: 'center', gap: 12 }}&gt;&#13;&#10;        &lt;Box style={{ background: '#0E9B78', borderRadius: 5, padding: '3px 11px' }}&gt;&#13;&#10;            &lt;Text style={{ fontSize: 14, fontWeight: 'bold', color: '#FFFFFF' }}&gt;第 15 节&lt;/Text&gt;&#13;&#10;        &lt;/Box&gt;&#13;&#10;        &lt;Text style={{ fontSize: 30, fontWeight: 'bold', color: '#16232E' }}&gt;核心知识点&lt;/Text&gt;&#13;&#10;        &lt;Text style={{ fontSize: 15, color: '#5A6B7A', marginTop: 10 }}&gt;· range() 与列表推导式&lt;/Text&gt;&#13;&#10;    &lt;/Box&gt;&#13;&#10;    &lt;Box style={{ position: 'absolute', left: 0, top: 0, width: '1280px', height: '720px' }}&gt;&#13;&#10;        &lt;svg width='1280' height='720' viewBox='0 0 1280 720'&gt;&#13;&#10;            &lt;rect x='64' y='96' width='1152' height='330' rx='12' fill='#FFFFFF' stroke='#D8E3EE' /&gt;&lt;rect x='64' y='96' width='1152' height='4' rx='2' fill='#1F5FA8' /&gt;&lt;text x='82' y='130' fontSize='15.5' fontWeight='bold' fill='#1F5FA8' textAnchor='start' fontFamily='Microsoft YaHei'&gt;2.4 列表推导式：一行搞定筛选&lt;/text&gt;&lt;text x='82' y='169.0' fontSize='13' fill='#3A4A58' textAnchor='start' fontFamily='Microsoft YaHei'&gt;· 什么时候用推导式&lt;/text&gt;&lt;text x='82' y='197.5' fontSize='13' fill='#3A4A58' textAnchor='start' fontFamily='Microsoft YaHei'&gt;· 什么时候不用&lt;/text&gt;&lt;rect x='64' y='574' width='1152' height='66' rx='12' fill='#EEF5FB' /&gt;&lt;text x='84' y='616' fontSize='14' fill='#243444' textAnchor='start' fontFamily='Microsoft YaHei'&gt;看不懂的地方先回讲义对应小节读一遍，再回来对着这页复述一次——能讲出来才算真懂。&lt;/text&gt;&#13;&#10;            &lt;text x='64' y='684' fontSize='13' fill='#8A9AAA' fontFamily='Microsoft YaHei'&gt;Python 讲授课件 · 逐节版&lt;/text&gt;&#13;&#10;            &lt;text x='1216' y='684' fontSize='13' fill='#8A9AAA' textAnchor='end' fontFamily='Microsoft YaHei'&gt;单元 3 · 第 15 节&lt;/text&gt;&#13;&#10;        &lt;/svg&gt;&#13;&#10;    &lt;/Box&gt;&#13;&#10;&lt;/Slide&gt;&#13;&#10;"/>
         <p:cNvGrpSpPr/>
         <p:nvPr/>
       </p:nvGrpSpPr>
@@ -3032,7 +3032,7 @@
   <p:cSld>
     <p:spTree>
       <p:nvGrpSpPr>
-        <p:cNvPr id="68" name="" descr="&lt;Slide style={{ width: '1280px', height: '720px', backgroundColor: '#FAFCFE', padding: 0, position: 'relative', overflow: 'hidden' }}&gt;&#13;&#10;    &lt;Box style={{ position: 'absolute', left: 64, top: 36, width: '1152px', flexDirection: 'row', alignItems: 'center', gap: 12 }}&gt;&#13;&#10;        &lt;Box style={{ background: '#0E9B78', borderRadius: 5, padding: '3px 11px' }}&gt;&#13;&#10;            &lt;Text style={{ fontSize: 14, fontWeight: 'bold', color: '#FFFFFF' }}&gt;第 16 节&lt;/Text&gt;&#13;&#10;        &lt;/Box&gt;&#13;&#10;        &lt;Text style={{ fontSize: 30, fontWeight: 'bold', color: '#16232E' }}&gt;核心知识点&lt;/Text&gt;&#13;&#10;        &lt;Text style={{ fontSize: 15, color: '#5A6B7A', marginTop: 10 }}&gt;· 切片、元组与 PEP 8 排版&lt;/Text&gt;&#13;&#10;    &lt;/Box&gt;&#13;&#10;    &lt;Box style={{ position: 'absolute', left: 0, top: 0, width: '1280px', height: '720px' }}&gt;&#13;&#10;        &lt;svg width='1280' height='720' viewBox='0 0 1280 720'&gt;&#13;&#10;            &lt;rect x='64' y='96' width='368' height='330' rx='12' fill='#FFFFFF' stroke='#D8E3EE' /&gt;&lt;rect x='64' y='96' width='368' height='4' rx='2' fill='#1F5FA8' /&gt;&lt;text x='82' y='130' fontSize='15.5' fontWeight='bold' fill='#1F5FA8' textAnchor='start' fontFamily='Microsoft YaHei'&gt;2.5 切片：一次取出一段&lt;/text&gt;&lt;text x='82' y='169.0' fontSize='13' fill='#3A4A58' textAnchor='start' fontFamily='Microsoft YaHei'&gt;· 切片也是浅拷贝&lt;/text&gt;&lt;rect x='468' y='96' width='368' height='330' rx='12' fill='#FFFFFF' stroke='#D8E3EE' /&gt;&lt;rect x='468' y='96' width='368' height='4' rx='2' fill='#1F5FA8' /&gt;&lt;text x='486' y='130' fontSize='15.5' fontWeight='bold' fill='#1F5FA8' textAnchor='start' fontFamily='Microsoft YaHei'&gt;2.6 元组：用括号表示&quot;不可修改&quot;&lt;/text&gt;&lt;text x='486' y='169.0' fontSize='13' fill='#3A4A58' textAnchor='start' fontFamily='Microsoft YaHei'&gt;· 只有一个元素的元组必须写逗号&lt;/text&gt;&lt;text x='486' y='197.5' fontSize='13' fill='#3A4A58' textAnchor='start' fontFamily='Microsoft YaHei'&gt;· 为什么字典的键要用元组这类不可变类型&lt;/text&gt;&lt;rect x='872' y='96' width='368' height='330' rx='12' fill='#FFFFFF' stroke='#D8E3EE' /&gt;&lt;rect x='872' y='96' width='368' height='4' rx='2' fill='#1F5FA8' /&gt;&lt;text x='890' y='130' fontSize='15.5' fontWeight='bold' fill='#1F5FA8' textAnchor='start' fontFamily='Microsoft YaHei'&gt;2.7 PEP 8：让代码能被人读&lt;/text&gt;&lt;text x='890' y='169.0' fontSize='13' fill='#3A4A58' textAnchor='start' fontFamily='Microsoft YaHei'&gt;· PEP 8 是 Python 官方风格指南，&lt;/text&gt;&lt;text x='890' y='188.5' fontSize='13' fill='#3A4A58' textAnchor='start' fontFamily='Microsoft YaHei'&gt;与功能无关但直接影响你能不能维护自己的代码。&lt;/text&gt;&lt;text x='64' y='470' fontSize='14.5' fontWeight='bold' fill='#0E9B78' textAnchor='start' fontFamily='Microsoft YaHei'&gt;本节的代码示例&lt;/text&gt;&lt;text x='64' y='500' fontSize='13' fill='#3A4A58' textAnchor='start' fontFamily='Microsoft YaHei'&gt;· for 循环基础&lt;/text&gt;&lt;text x='468' y='500' fontSize='13' fill='#3A4A58' textAnchor='start' fontFamily='Microsoft YaHei'&gt;· range 的四种形式&lt;/text&gt;&lt;text x='872' y='500' fontSize='13' fill='#3A4A58' textAnchor='start' fontFamily='Microsoft YaHei'&gt;· 常见循环搭档&lt;/text&gt;&lt;rect x='64' y='574' width='1152' height='66' rx='12' fill='#EEF5FB' /&gt;&lt;text x='84' y='616' fontSize='14' fill='#243444' textAnchor='start' fontFamily='Microsoft YaHei'&gt;看不懂的地方先回讲义对应小节读一遍，再回来对着这页复述一次——能讲出来才算真懂。&lt;/text&gt;&#13;&#10;            &lt;text x='64' y='684' fontSize='13' fill='#8A9AAA' fontFamily='Microsoft YaHei'&gt;Python 讲授课件 · 逐节版&lt;/text&gt;&#13;&#10;            &lt;text x='1216' y='684' fontSize='13' fill='#8A9AAA' textAnchor='end' fontFamily='Microsoft YaHei'&gt;单元 3 · 第 16 节&lt;/text&gt;&#13;&#10;        &lt;/svg&gt;&#13;&#10;    &lt;/Box&gt;&#13;&#10;&lt;/Slide&gt;&#13;&#10;"/>
+        <p:cNvPr id="68" name="" descr="&lt;Slide style={{ width: '1280px', height: '720px', backgroundColor: '#FAFCFE', padding: 0, position: 'relative', overflow: 'hidden' }}&gt;&#13;&#10;    &lt;Box style={{ position: 'absolute', left: 64, top: 36, width: '1152px', flexDirection: 'row', alignItems: 'center', gap: 12 }}&gt;&#13;&#10;        &lt;Box style={{ background: '#0E9B78', borderRadius: 5, padding: '3px 11px' }}&gt;&#13;&#10;            &lt;Text style={{ fontSize: 14, fontWeight: 'bold', color: '#FFFFFF' }}&gt;第 16 节&lt;/Text&gt;&#13;&#10;        &lt;/Box&gt;&#13;&#10;        &lt;Text style={{ fontSize: 30, fontWeight: 'bold', color: '#16232E' }}&gt;核心知识点&lt;/Text&gt;&#13;&#10;        &lt;Text style={{ fontSize: 15, color: '#5A6B7A', marginTop: 10 }}&gt;· 切片、元组与 PEP 8 排版&lt;/Text&gt;&#13;&#10;    &lt;/Box&gt;&#13;&#10;    &lt;Box style={{ position: 'absolute', left: 0, top: 0, width: '1280px', height: '720px' }}&gt;&#13;&#10;        &lt;svg width='1280' height='720' viewBox='0 0 1280 720'&gt;&#13;&#10;            &lt;rect x='64' y='96' width='368' height='330' rx='12' fill='#FFFFFF' stroke='#D8E3EE' /&gt;&lt;rect x='64' y='96' width='368' height='4' rx='2' fill='#1F5FA8' /&gt;&lt;text x='82' y='130' fontSize='15.5' fontWeight='bold' fill='#1F5FA8' textAnchor='start' fontFamily='Microsoft YaHei'&gt;2.5 切片：一次取出一段&lt;/text&gt;&lt;text x='82' y='169.0' fontSize='13' fill='#3A4A58' textAnchor='start' fontFamily='Microsoft YaHei'&gt;· 切片也是浅拷贝&lt;/text&gt;&lt;rect x='468' y='96' width='368' height='330' rx='12' fill='#FFFFFF' stroke='#D8E3EE' /&gt;&lt;rect x='468' y='96' width='368' height='4' rx='2' fill='#1F5FA8' /&gt;&lt;text x='486' y='130' fontSize='15.5' fontWeight='bold' fill='#1F5FA8' textAnchor='start' fontFamily='Microsoft YaHei'&gt;2.6 元组：用括号表示&quot;不可修改&quot;&lt;/text&gt;&lt;text x='486' y='169.0' fontSize='13' fill='#3A4A58' textAnchor='start' fontFamily='Microsoft YaHei'&gt;· 只有一个元素的元组必须写逗号&lt;/text&gt;&lt;text x='486' y='197.5' fontSize='13' fill='#3A4A58' textAnchor='start' fontFamily='Microsoft YaHei'&gt;· 为什么字典的键要用元组这类不可变类型&lt;/text&gt;&lt;rect x='872' y='96' width='368' height='330' rx='12' fill='#FFFFFF' stroke='#D8E3EE' /&gt;&lt;rect x='872' y='96' width='368' height='4' rx='2' fill='#1F5FA8' /&gt;&lt;text x='890' y='130' fontSize='15.5' fontWeight='bold' fill='#1F5FA8' textAnchor='start' fontFamily='Microsoft YaHei'&gt;2.7 PEP 8：让代码能被人读&lt;/text&gt;&lt;text x='890' y='169.0' fontSize='13' fill='#3A4A58' textAnchor='start' fontFamily='Microsoft YaHei'&gt;· 1. 一行不超过 79（现代放宽到 99）个字符，&lt;/text&gt;&lt;text x='890' y='188.5' fontSize='13' fill='#3A4A58' textAnchor='start' fontFamily='Microsoft YaHei'&gt;长了要换行。&lt;/text&gt;&lt;text x='890' y='217.0' fontSize='13' fill='#3A4A58' textAnchor='start' fontFamily='Microsoft YaHei'&gt;· 3. 缩进统一用 4 个空格，永远不要混用 Tab。&lt;/text&gt;&lt;text x='64' y='470' fontSize='14.5' fontWeight='bold' fill='#0E9B78' textAnchor='start' fontFamily='Microsoft YaHei'&gt;本节的代码示例&lt;/text&gt;&lt;text x='64' y='500' fontSize='13' fill='#3A4A58' textAnchor='start' fontFamily='Microsoft YaHei'&gt;· for 循环基础&lt;/text&gt;&lt;text x='468' y='500' fontSize='13' fill='#3A4A58' textAnchor='start' fontFamily='Microsoft YaHei'&gt;· range 的四种形式&lt;/text&gt;&lt;text x='872' y='500' fontSize='13' fill='#3A4A58' textAnchor='start' fontFamily='Microsoft YaHei'&gt;· 常见循环搭档&lt;/text&gt;&lt;rect x='64' y='574' width='1152' height='66' rx='12' fill='#EEF5FB' /&gt;&lt;text x='84' y='616' fontSize='14' fill='#243444' textAnchor='start' fontFamily='Microsoft YaHei'&gt;看不懂的地方先回讲义对应小节读一遍，再回来对着这页复述一次——能讲出来才算真懂。&lt;/text&gt;&#13;&#10;            &lt;text x='64' y='684' fontSize='13' fill='#8A9AAA' fontFamily='Microsoft YaHei'&gt;Python 讲授课件 · 逐节版&lt;/text&gt;&#13;&#10;            &lt;text x='1216' y='684' fontSize='13' fill='#8A9AAA' textAnchor='end' fontFamily='Microsoft YaHei'&gt;单元 3 · 第 16 节&lt;/text&gt;&#13;&#10;        &lt;/svg&gt;&#13;&#10;    &lt;/Box&gt;&#13;&#10;&lt;/Slide&gt;&#13;&#10;"/>
         <p:cNvGrpSpPr/>
         <p:nvPr/>
       </p:nvGrpSpPr>
@@ -3483,7 +3483,7 @@
   <p:cSld>
     <p:spTree>
       <p:nvGrpSpPr>
-        <p:cNvPr id="81" name="" descr="&lt;Slide style={{ width: '1280px', height: '720px', backgroundColor: '#FAFCFE', padding: 0, position: 'relative', overflow: 'hidden' }}&gt;&#13;&#10;    &lt;Box style={{ position: 'absolute', left: 64, top: 36, width: '1152px', flexDirection: 'row', alignItems: 'center', gap: 12 }}&gt;&#13;&#10;        &lt;Box style={{ background: '#0E9B78', borderRadius: 5, padding: '3px 11px' }}&gt;&#13;&#10;            &lt;Text style={{ fontSize: 14, fontWeight: 'bold', color: '#FFFFFF' }}&gt;第 17 节&lt;/Text&gt;&#13;&#10;        &lt;/Box&gt;&#13;&#10;        &lt;Text style={{ fontSize: 30, fontWeight: 'bold', color: '#16232E' }}&gt;核心知识点&lt;/Text&gt;&#13;&#10;        &lt;Text style={{ fontSize: 15, color: '#5A6B7A', marginTop: 10 }}&gt;· 动手实战与答案讲评&lt;/Text&gt;&#13;&#10;    &lt;/Box&gt;&#13;&#10;    &lt;Box style={{ position: 'absolute', left: 0, top: 0, width: '1280px', height: '720px' }}&gt;&#13;&#10;        &lt;svg width='1280' height='720' viewBox='0 0 1280 720'&gt;&#13;&#10;            &lt;rect x='64' y='96' width='368' height='330' rx='12' fill='#FFFFFF' stroke='#D8E3EE' /&gt;&lt;rect x='64' y='96' width='368' height='4' rx='2' fill='#1F5FA8' /&gt;&lt;text x='82' y='130' fontSize='15.5' fontWeight='bold' fill='#1F5FA8' textAnchor='start' fontFamily='Microsoft YaHei'&gt;基础档&lt;/text&gt;&lt;text x='82' y='169.0' fontSize='13' fill='#3A4A58' textAnchor='start' fontFamily='Microsoft YaHei'&gt;· 练习 3-1【打印与累加】&lt;/text&gt;&lt;text x='82' y='197.5' fontSize='13' fill='#3A4A58' textAnchor='start' fontFamily='Microsoft YaHei'&gt;· 练习 3-2【range 练手】&lt;/text&gt;&lt;text x='82' y='226.0' fontSize='13' fill='#3A4A58' textAnchor='start' fontFamily='Microsoft YaHei'&gt;· 练习 3-3【切片预测题】&lt;/text&gt;&lt;rect x='468' y='96' width='368' height='330' rx='12' fill='#FFFFFF' stroke='#D8E3EE' /&gt;&lt;rect x='468' y='96' width='368' height='4' rx='2' fill='#1F5FA8' /&gt;&lt;text x='486' y='130' fontSize='15.5' fontWeight='bold' fill='#1F5FA8' textAnchor='start' fontFamily='Microsoft YaHei'&gt;进阶档&lt;/text&gt;&lt;text x='486' y='169.0' fontSize='13' fill='#3A4A58' textAnchor='start' fontFamily='Microsoft YaHei'&gt;· 练习 3-5【商品总价计算器】&lt;/text&gt;&lt;text x='486' y='197.5' fontSize='13' fill='#3A4A58' textAnchor='start' fontFamily='Microsoft YaHei'&gt;· 练习 3-6【斐波那契数列】&lt;/text&gt;&lt;text x='486' y='226.0' fontSize='13' fill='#3A4A58' textAnchor='start' fontFamily='Microsoft YaHei'&gt;· 练习 3-7【元组与列表的选择】&lt;/text&gt;&lt;rect x='872' y='96' width='368' height='330' rx='12' fill='#FFFFFF' stroke='#D8E3EE' /&gt;&lt;rect x='872' y='96' width='368' height='4' rx='2' fill='#1F5FA8' /&gt;&lt;text x='890' y='130' fontSize='15.5' fontWeight='bold' fill='#1F5FA8' textAnchor='start' fontFamily='Microsoft YaHei'&gt;参考答案 3-1&lt;/text&gt;&lt;text x='890' y='169.0' fontSize='13' fill='#3A4A58' textAnchor='start' fontFamily='Microsoft YaHei'&gt;· scores = [88, 92, 79, 95, 60]&lt;/text&gt;&lt;rect x='64' y='574' width='1152' height='66' rx='12' fill='#EEF5FB' /&gt;&lt;text x='84' y='616' fontSize='14' fill='#243444' textAnchor='start' fontFamily='Microsoft YaHei'&gt;看不懂的地方先回讲义对应小节读一遍，再回来对着这页复述一次——能讲出来才算真懂。&lt;/text&gt;&#13;&#10;            &lt;text x='64' y='684' fontSize='13' fill='#8A9AAA' fontFamily='Microsoft YaHei'&gt;Python 讲授课件 · 逐节版&lt;/text&gt;&#13;&#10;            &lt;text x='1216' y='684' fontSize='13' fill='#8A9AAA' textAnchor='end' fontFamily='Microsoft YaHei'&gt;单元 3 · 第 17 节&lt;/text&gt;&#13;&#10;        &lt;/svg&gt;&#13;&#10;    &lt;/Box&gt;&#13;&#10;&lt;/Slide&gt;&#13;&#10;"/>
+        <p:cNvPr id="81" name="" descr="&lt;Slide style={{ width: '1280px', height: '720px', backgroundColor: '#FAFCFE', padding: 0, position: 'relative', overflow: 'hidden' }}&gt;&#13;&#10;    &lt;Box style={{ position: 'absolute', left: 64, top: 36, width: '1152px', flexDirection: 'row', alignItems: 'center', gap: 12 }}&gt;&#13;&#10;        &lt;Box style={{ background: '#0E9B78', borderRadius: 5, padding: '3px 11px' }}&gt;&#13;&#10;            &lt;Text style={{ fontSize: 14, fontWeight: 'bold', color: '#FFFFFF' }}&gt;第 17 节&lt;/Text&gt;&#13;&#10;        &lt;/Box&gt;&#13;&#10;        &lt;Text style={{ fontSize: 30, fontWeight: 'bold', color: '#16232E' }}&gt;核心知识点&lt;/Text&gt;&#13;&#10;        &lt;Text style={{ fontSize: 15, color: '#5A6B7A', marginTop: 10 }}&gt;· 动手实战与答案讲评&lt;/Text&gt;&#13;&#10;    &lt;/Box&gt;&#13;&#10;    &lt;Box style={{ position: 'absolute', left: 0, top: 0, width: '1280px', height: '720px' }}&gt;&#13;&#10;        &lt;svg width='1280' height='720' viewBox='0 0 1280 720'&gt;&#13;&#10;            &lt;rect x='64' y='96' width='368' height='330' rx='12' fill='#FFFFFF' stroke='#D8E3EE' /&gt;&lt;rect x='64' y='96' width='368' height='4' rx='2' fill='#1F5FA8' /&gt;&lt;text x='82' y='130' fontSize='15.5' fontWeight='bold' fill='#1F5FA8' textAnchor='start' fontFamily='Microsoft YaHei'&gt;基础档&lt;/text&gt;&lt;text x='82' y='169.0' fontSize='13' fill='#3A4A58' textAnchor='start' fontFamily='Microsoft YaHei'&gt;· 练习 3-1【打印与累加】&lt;/text&gt;&lt;text x='82' y='197.5' fontSize='13' fill='#3A4A58' textAnchor='start' fontFamily='Microsoft YaHei'&gt;· 练习 3-2【range 练手】&lt;/text&gt;&lt;text x='82' y='226.0' fontSize='13' fill='#3A4A58' textAnchor='start' fontFamily='Microsoft YaHei'&gt;· 练习 3-3【切片预测题】&lt;/text&gt;&lt;rect x='468' y='96' width='368' height='330' rx='12' fill='#FFFFFF' stroke='#D8E3EE' /&gt;&lt;rect x='468' y='96' width='368' height='4' rx='2' fill='#1F5FA8' /&gt;&lt;text x='486' y='130' fontSize='15.5' fontWeight='bold' fill='#1F5FA8' textAnchor='start' fontFamily='Microsoft YaHei'&gt;进阶档&lt;/text&gt;&lt;text x='486' y='169.0' fontSize='13' fill='#3A4A58' textAnchor='start' fontFamily='Microsoft YaHei'&gt;· 练习 3-5【商品总价计算器】&lt;/text&gt;&lt;text x='486' y='197.5' fontSize='13' fill='#3A4A58' textAnchor='start' fontFamily='Microsoft YaHei'&gt;· 练习 3-6【斐波那契数列】&lt;/text&gt;&lt;text x='486' y='226.0' fontSize='13' fill='#3A4A58' textAnchor='start' fontFamily='Microsoft YaHei'&gt;· 练习 3-7【元组与列表的选择】&lt;/text&gt;&lt;rect x='872' y='96' width='368' height='330' rx='12' fill='#FFFFFF' stroke='#D8E3EE' /&gt;&lt;rect x='872' y='96' width='368' height='4' rx='2' fill='#1F5FA8' /&gt;&lt;text x='890' y='130' fontSize='15.5' fontWeight='bold' fill='#1F5FA8' textAnchor='start' fontFamily='Microsoft YaHei'&gt;参考答案 3-9&lt;/text&gt;&lt;text x='890' y='169.0' fontSize='13' fill='#3A4A58' textAnchor='start' fontFamily='Microsoft YaHei'&gt;· 2] 的结果里有空格，因为原串第 6&lt;/text&gt;&lt;text x='890' y='188.5' fontSize='13' fill='#3A4A58' textAnchor='start' fontFamily='Microsoft YaHei'&gt;位就是空格——切片不会帮你跳过空白，&lt;/text&gt;&lt;text x='890' y='208.0' fontSize='13' fill='#3A4A58' textAnchor='start' fontFamily='Microsoft YaHei'&gt;要跳觉得先清理。&lt;/text&gt;&lt;rect x='64' y='574' width='1152' height='66' rx='12' fill='#EEF5FB' /&gt;&lt;text x='84' y='616' fontSize='14' fill='#243444' textAnchor='start' fontFamily='Microsoft YaHei'&gt;看不懂的地方先回讲义对应小节读一遍，再回来对着这页复述一次——能讲出来才算真懂。&lt;/text&gt;&#13;&#10;            &lt;text x='64' y='684' fontSize='13' fill='#8A9AAA' fontFamily='Microsoft YaHei'&gt;Python 讲授课件 · 逐节版&lt;/text&gt;&#13;&#10;            &lt;text x='1216' y='684' fontSize='13' fill='#8A9AAA' textAnchor='end' fontFamily='Microsoft YaHei'&gt;单元 3 · 第 17 节&lt;/text&gt;&#13;&#10;        &lt;/svg&gt;&#13;&#10;    &lt;/Box&gt;&#13;&#10;&lt;/Slide&gt;&#13;&#10;"/>
         <p:cNvGrpSpPr/>
         <p:nvPr/>
       </p:nvGrpSpPr>

--- a/python-course-ppt/逐节课件/Python讲授课件-单元03.pptx
+++ b/python-course-ppt/逐节课件/Python讲授课件-单元03.pptx
@@ -236,6 +236,1272 @@
     </a:lvl9pPr>
   </p:notesStyle>
 </p:notesMaster>
+</file>
+
+<file path=ppt/notesSlides/notesSlide1.xml><?xml version="1.0" encoding="utf-8"?>
+<p:notes xmlns:a="http://schemas.openxmlformats.org/drawingml/2006/main" xmlns:p="http://schemas.openxmlformats.org/presentationml/2006/main" xmlns:r="http://schemas.openxmlformats.org/officeDocument/2006/relationships">
+  <p:cSld>
+    <p:spTree>
+      <p:nvGrpSpPr>
+        <p:cNvPr id="1" name=""/>
+        <p:cNvGrpSpPr/>
+        <p:nvPr/>
+      </p:nvGrpSpPr>
+      <p:grpSpPr>
+        <a:xfrm>
+          <a:off x="0" y="0"/>
+          <a:ext cx="0" cy="0"/>
+          <a:chOff x="0" y="0"/>
+          <a:chExt cx="0" cy="0"/>
+        </a:xfrm>
+      </p:grpSpPr>
+      <p:sp>
+        <p:nvSpPr>
+          <p:cNvPr id="2" name="讲课提示"/>
+          <p:cNvSpPr txBox="1"/>
+          <p:nvPr/>
+        </p:nvSpPr>
+        <p:spPr>
+          <a:xfrm>
+            <a:off x="457200" y="457200"/>
+            <a:ext cx="6858000" cy="4800600"/>
+          </a:xfrm>
+          <a:prstGeom prst="rect">
+            <a:avLst/>
+          </a:prstGeom>
+        </p:spPr>
+        <p:txBody>
+          <a:bodyPr wrap="square"/>
+          <a:lstStyle/>
+          <a:p>
+            <a:r>
+              <a:rPr lang="zh-CN" dirty="0"/>
+              <a:t>单元 3 · 单元 3 · 操作列表</a:t>
+            </a:r>
+          </a:p>
+          <a:p>
+            <a:r>
+              <a:rPr lang="zh-CN" dirty="0"/>
+              <a:t/>
+            </a:r>
+          </a:p>
+          <a:p>
+            <a:r>
+              <a:rPr lang="zh-CN" dirty="0"/>
+              <a:t>本单元包含以下课节：</a:t>
+            </a:r>
+          </a:p>
+          <a:p>
+            <a:r>
+              <a:rPr lang="zh-CN" dirty="0"/>
+              <a:t>· 第 14 节 for 循环：把重复交给机器</a:t>
+            </a:r>
+          </a:p>
+          <a:p>
+            <a:r>
+              <a:rPr lang="zh-CN" dirty="0"/>
+              <a:t>· 第 15 节 range() 与列表推导式</a:t>
+            </a:r>
+          </a:p>
+          <a:p>
+            <a:r>
+              <a:rPr lang="zh-CN" dirty="0"/>
+              <a:t>· 第 16 节 切片、元组与 PEP 8 排版</a:t>
+            </a:r>
+          </a:p>
+          <a:p>
+            <a:r>
+              <a:rPr lang="zh-CN" dirty="0"/>
+              <a:t>· 第 17 节 动手实战与答案讲评</a:t>
+            </a:r>
+          </a:p>
+          <a:p>
+            <a:r>
+              <a:rPr lang="zh-CN" dirty="0"/>
+              <a:t>· 第 18 节 单元 3 验收复盘</a:t>
+            </a:r>
+          </a:p>
+          <a:p>
+            <a:r>
+              <a:rPr lang="zh-CN" dirty="0"/>
+              <a:t/>
+            </a:r>
+          </a:p>
+          <a:p>
+            <a:r>
+              <a:rPr lang="zh-CN" dirty="0"/>
+              <a:t>开场用 3 分钟讲清：这个单元学完能做出什么，最后会被关卡怎么验。</a:t>
+            </a:r>
+          </a:p>
+        </p:txBody>
+      </p:sp>
+    </p:spTree>
+  </p:cSld>
+  <p:clrMapOvr>
+    <a:masterClrMapping/>
+  </p:clrMapOvr>
+</p:notes>
+</file>
+
+<file path=ppt/notesSlides/notesSlide10.xml><?xml version="1.0" encoding="utf-8"?>
+<p:notes xmlns:a="http://schemas.openxmlformats.org/drawingml/2006/main" xmlns:p="http://schemas.openxmlformats.org/presentationml/2006/main" xmlns:r="http://schemas.openxmlformats.org/officeDocument/2006/relationships">
+  <p:cSld>
+    <p:spTree>
+      <p:nvGrpSpPr>
+        <p:cNvPr id="1" name=""/>
+        <p:cNvGrpSpPr/>
+        <p:nvPr/>
+      </p:nvGrpSpPr>
+      <p:grpSpPr>
+        <a:xfrm>
+          <a:off x="0" y="0"/>
+          <a:ext cx="0" cy="0"/>
+          <a:chOff x="0" y="0"/>
+          <a:chExt cx="0" cy="0"/>
+        </a:xfrm>
+      </p:grpSpPr>
+      <p:sp>
+        <p:nvSpPr>
+          <p:cNvPr id="2" name="讲课提示"/>
+          <p:cNvSpPr txBox="1"/>
+          <p:nvPr/>
+        </p:nvSpPr>
+        <p:spPr>
+          <a:xfrm>
+            <a:off x="457200" y="457200"/>
+            <a:ext cx="6858000" cy="4800600"/>
+          </a:xfrm>
+          <a:prstGeom prst="rect">
+            <a:avLst/>
+          </a:prstGeom>
+        </p:spPr>
+        <p:txBody>
+          <a:bodyPr wrap="square"/>
+          <a:lstStyle/>
+          <a:p>
+            <a:r>
+              <a:rPr lang="zh-CN" dirty="0"/>
+              <a:t>第 18 节 · 单元 3 验收复盘</a:t>
+            </a:r>
+          </a:p>
+          <a:p>
+            <a:r>
+              <a:rPr lang="zh-CN" dirty="0"/>
+              <a:t>单元 3 · 操作列表 · W3</a:t>
+            </a:r>
+          </a:p>
+          <a:p>
+            <a:r>
+              <a:rPr lang="zh-CN" dirty="0"/>
+              <a:t/>
+            </a:r>
+          </a:p>
+          <a:p>
+            <a:r>
+              <a:rPr lang="zh-CN" dirty="0"/>
+              <a:t>学习目标：确认循环、range、推导式、切片、元组都过关</a:t>
+            </a:r>
+          </a:p>
+          <a:p>
+            <a:r>
+              <a:rPr lang="zh-CN" dirty="0"/>
+              <a:t/>
+            </a:r>
+          </a:p>
+          <a:p>
+            <a:r>
+              <a:rPr lang="zh-CN" dirty="0"/>
+              <a:t>课堂实操（40 分钟，不看答案）：</a:t>
+            </a:r>
+          </a:p>
+          <a:p>
+            <a:r>
+              <a:rPr lang="zh-CN" dirty="0"/>
+              <a:t>· 逐条打勾验收自测</a:t>
+            </a:r>
+          </a:p>
+          <a:p>
+            <a:r>
+              <a:rPr lang="zh-CN" dirty="0"/>
+              <a:t>· 互相考range / 切片的易错点</a:t>
+            </a:r>
+          </a:p>
+          <a:p>
+            <a:r>
+              <a:rPr lang="zh-CN" dirty="0"/>
+              <a:t/>
+            </a:r>
+          </a:p>
+          <a:p>
+            <a:r>
+              <a:rPr lang="zh-CN" dirty="0"/>
+              <a:t>课后作业：</a:t>
+            </a:r>
+          </a:p>
+          <a:p>
+            <a:r>
+              <a:rPr lang="zh-CN" dirty="0"/>
+              <a:t>· 完成本单元小结与产出检查</a:t>
+            </a:r>
+          </a:p>
+          <a:p>
+            <a:r>
+              <a:rPr lang="zh-CN" dirty="0"/>
+              <a:t/>
+            </a:r>
+          </a:p>
+          <a:p>
+            <a:r>
+              <a:rPr lang="zh-CN" dirty="0"/>
+              <a:t>节奏：讲 20 分钟 → 学员自己敲 40 分钟（不看答案）→ 对讲评自查 20 分钟 → 写作业 10 分钟。</a:t>
+            </a:r>
+          </a:p>
+        </p:txBody>
+      </p:sp>
+    </p:spTree>
+  </p:cSld>
+  <p:clrMapOvr>
+    <a:masterClrMapping/>
+  </p:clrMapOvr>
+</p:notes>
+</file>
+
+<file path=ppt/notesSlides/notesSlide11.xml><?xml version="1.0" encoding="utf-8"?>
+<p:notes xmlns:a="http://schemas.openxmlformats.org/drawingml/2006/main" xmlns:p="http://schemas.openxmlformats.org/presentationml/2006/main" xmlns:r="http://schemas.openxmlformats.org/officeDocument/2006/relationships">
+  <p:cSld>
+    <p:spTree>
+      <p:nvGrpSpPr>
+        <p:cNvPr id="1" name=""/>
+        <p:cNvGrpSpPr/>
+        <p:nvPr/>
+      </p:nvGrpSpPr>
+      <p:grpSpPr>
+        <a:xfrm>
+          <a:off x="0" y="0"/>
+          <a:ext cx="0" cy="0"/>
+          <a:chOff x="0" y="0"/>
+          <a:chExt cx="0" cy="0"/>
+        </a:xfrm>
+      </p:grpSpPr>
+      <p:sp>
+        <p:nvSpPr>
+          <p:cNvPr id="2" name="讲课提示"/>
+          <p:cNvSpPr txBox="1"/>
+          <p:nvPr/>
+        </p:nvSpPr>
+        <p:spPr>
+          <a:xfrm>
+            <a:off x="457200" y="457200"/>
+            <a:ext cx="6858000" cy="4800600"/>
+          </a:xfrm>
+          <a:prstGeom prst="rect">
+            <a:avLst/>
+          </a:prstGeom>
+        </p:spPr>
+        <p:txBody>
+          <a:bodyPr wrap="square"/>
+          <a:lstStyle/>
+          <a:p>
+            <a:r>
+              <a:rPr lang="zh-CN" dirty="0"/>
+              <a:t>第 18 节 · 核心知识点：单元 3 验收复盘</a:t>
+            </a:r>
+          </a:p>
+          <a:p>
+            <a:r>
+              <a:rPr lang="zh-CN" dirty="0"/>
+              <a:t/>
+            </a:r>
+          </a:p>
+          <a:p>
+            <a:r>
+              <a:rPr lang="zh-CN" dirty="0"/>
+              <a:t>讲这一页时：先让学生说出上节课的结论，再逐块讲要点。</a:t>
+            </a:r>
+          </a:p>
+          <a:p>
+            <a:r>
+              <a:rPr lang="zh-CN" dirty="0"/>
+              <a:t>每讲完一块，问一句「这一步如果写错了，报错会长什么样？」——把错误提前讲。</a:t>
+            </a:r>
+          </a:p>
+          <a:p>
+            <a:r>
+              <a:rPr lang="zh-CN" dirty="0"/>
+              <a:t/>
+            </a:r>
+          </a:p>
+          <a:p>
+            <a:r>
+              <a:rPr lang="zh-CN" dirty="0"/>
+              <a:t>本节目标：确认循环、range、推导式、切片、元组都过关</a:t>
+            </a:r>
+          </a:p>
+          <a:p>
+            <a:r>
+              <a:rPr lang="zh-CN" dirty="0"/>
+              <a:t/>
+            </a:r>
+          </a:p>
+          <a:p>
+            <a:r>
+              <a:rPr lang="zh-CN" dirty="0"/>
+              <a:t>看不到懂的地方，回讲义对应小节读一遍，再回来对着这页复述一次——能讲出来才算真懂。</a:t>
+            </a:r>
+          </a:p>
+        </p:txBody>
+      </p:sp>
+    </p:spTree>
+  </p:cSld>
+  <p:clrMapOvr>
+    <a:masterClrMapping/>
+  </p:clrMapOvr>
+</p:notes>
+</file>
+
+<file path=ppt/notesSlides/notesSlide12.xml><?xml version="1.0" encoding="utf-8"?>
+<p:notes xmlns:a="http://schemas.openxmlformats.org/drawingml/2006/main" xmlns:p="http://schemas.openxmlformats.org/presentationml/2006/main" xmlns:r="http://schemas.openxmlformats.org/officeDocument/2006/relationships">
+  <p:cSld>
+    <p:spTree>
+      <p:nvGrpSpPr>
+        <p:cNvPr id="1" name=""/>
+        <p:cNvGrpSpPr/>
+        <p:nvPr/>
+      </p:nvGrpSpPr>
+      <p:grpSpPr>
+        <a:xfrm>
+          <a:off x="0" y="0"/>
+          <a:ext cx="0" cy="0"/>
+          <a:chOff x="0" y="0"/>
+          <a:chExt cx="0" cy="0"/>
+        </a:xfrm>
+      </p:grpSpPr>
+      <p:sp>
+        <p:nvSpPr>
+          <p:cNvPr id="2" name="讲课提示"/>
+          <p:cNvSpPr txBox="1"/>
+          <p:nvPr/>
+        </p:nvSpPr>
+        <p:spPr>
+          <a:xfrm>
+            <a:off x="457200" y="457200"/>
+            <a:ext cx="6858000" cy="4800600"/>
+          </a:xfrm>
+          <a:prstGeom prst="rect">
+            <a:avLst/>
+          </a:prstGeom>
+        </p:spPr>
+        <p:txBody>
+          <a:bodyPr wrap="square"/>
+          <a:lstStyle/>
+          <a:p>
+            <a:r>
+              <a:rPr lang="zh-CN" dirty="0"/>
+              <a:t>单元 3 小结 · 单元 3 · 小结</a:t>
+            </a:r>
+          </a:p>
+          <a:p>
+            <a:r>
+              <a:rPr lang="zh-CN" dirty="0"/>
+              <a:t/>
+            </a:r>
+          </a:p>
+          <a:p>
+            <a:r>
+              <a:rPr lang="zh-CN" dirty="0"/>
+              <a:t>收尾动作：让学生合上讲义，口述本单元三个最重要的结论；说不出来的，回对应课节。</a:t>
+            </a:r>
+          </a:p>
+          <a:p>
+            <a:r>
+              <a:rPr lang="zh-CN" dirty="0"/>
+              <a:t>然后当场勾一遍本单元课节的「已完成」，没打勾的进下一单元前补掉。</a:t>
+            </a:r>
+          </a:p>
+        </p:txBody>
+      </p:sp>
+    </p:spTree>
+  </p:cSld>
+  <p:clrMapOvr>
+    <a:masterClrMapping/>
+  </p:clrMapOvr>
+</p:notes>
+</file>
+
+<file path=ppt/notesSlides/notesSlide2.xml><?xml version="1.0" encoding="utf-8"?>
+<p:notes xmlns:a="http://schemas.openxmlformats.org/drawingml/2006/main" xmlns:p="http://schemas.openxmlformats.org/presentationml/2006/main" xmlns:r="http://schemas.openxmlformats.org/officeDocument/2006/relationships">
+  <p:cSld>
+    <p:spTree>
+      <p:nvGrpSpPr>
+        <p:cNvPr id="1" name=""/>
+        <p:cNvGrpSpPr/>
+        <p:nvPr/>
+      </p:nvGrpSpPr>
+      <p:grpSpPr>
+        <a:xfrm>
+          <a:off x="0" y="0"/>
+          <a:ext cx="0" cy="0"/>
+          <a:chOff x="0" y="0"/>
+          <a:chExt cx="0" cy="0"/>
+        </a:xfrm>
+      </p:grpSpPr>
+      <p:sp>
+        <p:nvSpPr>
+          <p:cNvPr id="2" name="讲课提示"/>
+          <p:cNvSpPr txBox="1"/>
+          <p:nvPr/>
+        </p:nvSpPr>
+        <p:spPr>
+          <a:xfrm>
+            <a:off x="457200" y="457200"/>
+            <a:ext cx="6858000" cy="4800600"/>
+          </a:xfrm>
+          <a:prstGeom prst="rect">
+            <a:avLst/>
+          </a:prstGeom>
+        </p:spPr>
+        <p:txBody>
+          <a:bodyPr wrap="square"/>
+          <a:lstStyle/>
+          <a:p>
+            <a:r>
+              <a:rPr lang="zh-CN" dirty="0"/>
+              <a:t>第 14 节 · for 循环：把重复交给机器</a:t>
+            </a:r>
+          </a:p>
+          <a:p>
+            <a:r>
+              <a:rPr lang="zh-CN" dirty="0"/>
+              <a:t>单元 3 · 操作列表 · W3</a:t>
+            </a:r>
+          </a:p>
+          <a:p>
+            <a:r>
+              <a:rPr lang="zh-CN" dirty="0"/>
+              <a:t/>
+            </a:r>
+          </a:p>
+          <a:p>
+            <a:r>
+              <a:rPr lang="zh-CN" dirty="0"/>
+              <a:t>学习目标：会用 for 遍历列表，避开常见缩进错误</a:t>
+            </a:r>
+          </a:p>
+          <a:p>
+            <a:r>
+              <a:rPr lang="zh-CN" dirty="0"/>
+              <a:t/>
+            </a:r>
+          </a:p>
+          <a:p>
+            <a:r>
+              <a:rPr lang="zh-CN" dirty="0"/>
+              <a:t>课堂实操（40 分钟，不看答案）：</a:t>
+            </a:r>
+          </a:p>
+          <a:p>
+            <a:r>
+              <a:rPr lang="zh-CN" dirty="0"/>
+              <a:t>· 故意写四种缩进错误并当场读懂报错</a:t>
+            </a:r>
+          </a:p>
+          <a:p>
+            <a:r>
+              <a:rPr lang="zh-CN" dirty="0"/>
+              <a:t>· 把 5 行重复代码改成一个循环</a:t>
+            </a:r>
+          </a:p>
+          <a:p>
+            <a:r>
+              <a:rPr lang="zh-CN" dirty="0"/>
+              <a:t/>
+            </a:r>
+          </a:p>
+          <a:p>
+            <a:r>
+              <a:rPr lang="zh-CN" dirty="0"/>
+              <a:t>课后作业：</a:t>
+            </a:r>
+          </a:p>
+          <a:p>
+            <a:r>
+              <a:rPr lang="zh-CN" dirty="0"/>
+              <a:t>· 完成动手练习基础档</a:t>
+            </a:r>
+          </a:p>
+          <a:p>
+            <a:r>
+              <a:rPr lang="zh-CN" dirty="0"/>
+              <a:t/>
+            </a:r>
+          </a:p>
+          <a:p>
+            <a:r>
+              <a:rPr lang="zh-CN" dirty="0"/>
+              <a:t>节奏：讲 20 分钟 → 学员自己敲 40 分钟（不看答案）→ 对讲评自查 20 分钟 → 写作业 10 分钟。</a:t>
+            </a:r>
+          </a:p>
+        </p:txBody>
+      </p:sp>
+    </p:spTree>
+  </p:cSld>
+  <p:clrMapOvr>
+    <a:masterClrMapping/>
+  </p:clrMapOvr>
+</p:notes>
+</file>
+
+<file path=ppt/notesSlides/notesSlide3.xml><?xml version="1.0" encoding="utf-8"?>
+<p:notes xmlns:a="http://schemas.openxmlformats.org/drawingml/2006/main" xmlns:p="http://schemas.openxmlformats.org/presentationml/2006/main" xmlns:r="http://schemas.openxmlformats.org/officeDocument/2006/relationships">
+  <p:cSld>
+    <p:spTree>
+      <p:nvGrpSpPr>
+        <p:cNvPr id="1" name=""/>
+        <p:cNvGrpSpPr/>
+        <p:nvPr/>
+      </p:nvGrpSpPr>
+      <p:grpSpPr>
+        <a:xfrm>
+          <a:off x="0" y="0"/>
+          <a:ext cx="0" cy="0"/>
+          <a:chOff x="0" y="0"/>
+          <a:chExt cx="0" cy="0"/>
+        </a:xfrm>
+      </p:grpSpPr>
+      <p:sp>
+        <p:nvSpPr>
+          <p:cNvPr id="2" name="讲课提示"/>
+          <p:cNvSpPr txBox="1"/>
+          <p:nvPr/>
+        </p:nvSpPr>
+        <p:spPr>
+          <a:xfrm>
+            <a:off x="457200" y="457200"/>
+            <a:ext cx="6858000" cy="4800600"/>
+          </a:xfrm>
+          <a:prstGeom prst="rect">
+            <a:avLst/>
+          </a:prstGeom>
+        </p:spPr>
+        <p:txBody>
+          <a:bodyPr wrap="square"/>
+          <a:lstStyle/>
+          <a:p>
+            <a:r>
+              <a:rPr lang="zh-CN" dirty="0"/>
+              <a:t>第 14 节 · 核心知识点：for 循环：把重复交给机器</a:t>
+            </a:r>
+          </a:p>
+          <a:p>
+            <a:r>
+              <a:rPr lang="zh-CN" dirty="0"/>
+              <a:t/>
+            </a:r>
+          </a:p>
+          <a:p>
+            <a:r>
+              <a:rPr lang="zh-CN" dirty="0"/>
+              <a:t>讲这一页时：先让学生说出上节课的结论，再逐块讲要点。</a:t>
+            </a:r>
+          </a:p>
+          <a:p>
+            <a:r>
+              <a:rPr lang="zh-CN" dirty="0"/>
+              <a:t>每讲完一块，问一句「这一步如果写错了，报错会长什么样？」——把错误提前讲。</a:t>
+            </a:r>
+          </a:p>
+          <a:p>
+            <a:r>
+              <a:rPr lang="zh-CN" dirty="0"/>
+              <a:t/>
+            </a:r>
+          </a:p>
+          <a:p>
+            <a:r>
+              <a:rPr lang="zh-CN" dirty="0"/>
+              <a:t>本节目标：会用 for 遍历列表，避开常见缩进错误</a:t>
+            </a:r>
+          </a:p>
+          <a:p>
+            <a:r>
+              <a:rPr lang="zh-CN" dirty="0"/>
+              <a:t/>
+            </a:r>
+          </a:p>
+          <a:p>
+            <a:r>
+              <a:rPr lang="zh-CN" dirty="0"/>
+              <a:t>看不到懂的地方，回讲义对应小节读一遍，再回来对着这页复述一次——能讲出来才算真懂。</a:t>
+            </a:r>
+          </a:p>
+        </p:txBody>
+      </p:sp>
+    </p:spTree>
+  </p:cSld>
+  <p:clrMapOvr>
+    <a:masterClrMapping/>
+  </p:clrMapOvr>
+</p:notes>
+</file>
+
+<file path=ppt/notesSlides/notesSlide4.xml><?xml version="1.0" encoding="utf-8"?>
+<p:notes xmlns:a="http://schemas.openxmlformats.org/drawingml/2006/main" xmlns:p="http://schemas.openxmlformats.org/presentationml/2006/main" xmlns:r="http://schemas.openxmlformats.org/officeDocument/2006/relationships">
+  <p:cSld>
+    <p:spTree>
+      <p:nvGrpSpPr>
+        <p:cNvPr id="1" name=""/>
+        <p:cNvGrpSpPr/>
+        <p:nvPr/>
+      </p:nvGrpSpPr>
+      <p:grpSpPr>
+        <a:xfrm>
+          <a:off x="0" y="0"/>
+          <a:ext cx="0" cy="0"/>
+          <a:chOff x="0" y="0"/>
+          <a:chExt cx="0" cy="0"/>
+        </a:xfrm>
+      </p:grpSpPr>
+      <p:sp>
+        <p:nvSpPr>
+          <p:cNvPr id="2" name="讲课提示"/>
+          <p:cNvSpPr txBox="1"/>
+          <p:nvPr/>
+        </p:nvSpPr>
+        <p:spPr>
+          <a:xfrm>
+            <a:off x="457200" y="457200"/>
+            <a:ext cx="6858000" cy="4800600"/>
+          </a:xfrm>
+          <a:prstGeom prst="rect">
+            <a:avLst/>
+          </a:prstGeom>
+        </p:spPr>
+        <p:txBody>
+          <a:bodyPr wrap="square"/>
+          <a:lstStyle/>
+          <a:p>
+            <a:r>
+              <a:rPr lang="zh-CN" dirty="0"/>
+              <a:t>第 15 节 · range() 与列表推导式</a:t>
+            </a:r>
+          </a:p>
+          <a:p>
+            <a:r>
+              <a:rPr lang="zh-CN" dirty="0"/>
+              <a:t>单元 3 · 操作列表 · W3</a:t>
+            </a:r>
+          </a:p>
+          <a:p>
+            <a:r>
+              <a:rPr lang="zh-CN" dirty="0"/>
+              <a:t/>
+            </a:r>
+          </a:p>
+          <a:p>
+            <a:r>
+              <a:rPr lang="zh-CN" dirty="0"/>
+              <a:t>学习目标：掌握 range 的各种形式，能用推导式一行搞定筛选</a:t>
+            </a:r>
+          </a:p>
+          <a:p>
+            <a:r>
+              <a:rPr lang="zh-CN" dirty="0"/>
+              <a:t/>
+            </a:r>
+          </a:p>
+          <a:p>
+            <a:r>
+              <a:rPr lang="zh-CN" dirty="0"/>
+              <a:t>课堂实操（40 分钟，不看答案）：</a:t>
+            </a:r>
+          </a:p>
+          <a:p>
+            <a:r>
+              <a:rPr lang="zh-CN" dirty="0"/>
+              <a:t>· 预测 range(2,10,3) 的结果再验证</a:t>
+            </a:r>
+          </a:p>
+          <a:p>
+            <a:r>
+              <a:rPr lang="zh-CN" dirty="0"/>
+              <a:t>· 把 5 行循环改写成一行推导式</a:t>
+            </a:r>
+          </a:p>
+          <a:p>
+            <a:r>
+              <a:rPr lang="zh-CN" dirty="0"/>
+              <a:t/>
+            </a:r>
+          </a:p>
+          <a:p>
+            <a:r>
+              <a:rPr lang="zh-CN" dirty="0"/>
+              <a:t>课后作业：</a:t>
+            </a:r>
+          </a:p>
+          <a:p>
+            <a:r>
+              <a:rPr lang="zh-CN" dirty="0"/>
+              <a:t>· 完成动手练习进阶档</a:t>
+            </a:r>
+          </a:p>
+          <a:p>
+            <a:r>
+              <a:rPr lang="zh-CN" dirty="0"/>
+              <a:t/>
+            </a:r>
+          </a:p>
+          <a:p>
+            <a:r>
+              <a:rPr lang="zh-CN" dirty="0"/>
+              <a:t>节奏：讲 20 分钟 → 学员自己敲 40 分钟（不看答案）→ 对讲评自查 20 分钟 → 写作业 10 分钟。</a:t>
+            </a:r>
+          </a:p>
+        </p:txBody>
+      </p:sp>
+    </p:spTree>
+  </p:cSld>
+  <p:clrMapOvr>
+    <a:masterClrMapping/>
+  </p:clrMapOvr>
+</p:notes>
+</file>
+
+<file path=ppt/notesSlides/notesSlide5.xml><?xml version="1.0" encoding="utf-8"?>
+<p:notes xmlns:a="http://schemas.openxmlformats.org/drawingml/2006/main" xmlns:p="http://schemas.openxmlformats.org/presentationml/2006/main" xmlns:r="http://schemas.openxmlformats.org/officeDocument/2006/relationships">
+  <p:cSld>
+    <p:spTree>
+      <p:nvGrpSpPr>
+        <p:cNvPr id="1" name=""/>
+        <p:cNvGrpSpPr/>
+        <p:nvPr/>
+      </p:nvGrpSpPr>
+      <p:grpSpPr>
+        <a:xfrm>
+          <a:off x="0" y="0"/>
+          <a:ext cx="0" cy="0"/>
+          <a:chOff x="0" y="0"/>
+          <a:chExt cx="0" cy="0"/>
+        </a:xfrm>
+      </p:grpSpPr>
+      <p:sp>
+        <p:nvSpPr>
+          <p:cNvPr id="2" name="讲课提示"/>
+          <p:cNvSpPr txBox="1"/>
+          <p:nvPr/>
+        </p:nvSpPr>
+        <p:spPr>
+          <a:xfrm>
+            <a:off x="457200" y="457200"/>
+            <a:ext cx="6858000" cy="4800600"/>
+          </a:xfrm>
+          <a:prstGeom prst="rect">
+            <a:avLst/>
+          </a:prstGeom>
+        </p:spPr>
+        <p:txBody>
+          <a:bodyPr wrap="square"/>
+          <a:lstStyle/>
+          <a:p>
+            <a:r>
+              <a:rPr lang="zh-CN" dirty="0"/>
+              <a:t>第 15 节 · 核心知识点：range() 与列表推导式</a:t>
+            </a:r>
+          </a:p>
+          <a:p>
+            <a:r>
+              <a:rPr lang="zh-CN" dirty="0"/>
+              <a:t/>
+            </a:r>
+          </a:p>
+          <a:p>
+            <a:r>
+              <a:rPr lang="zh-CN" dirty="0"/>
+              <a:t>讲这一页时：先让学生说出上节课的结论，再逐块讲要点。</a:t>
+            </a:r>
+          </a:p>
+          <a:p>
+            <a:r>
+              <a:rPr lang="zh-CN" dirty="0"/>
+              <a:t>每讲完一块，问一句「这一步如果写错了，报错会长什么样？」——把错误提前讲。</a:t>
+            </a:r>
+          </a:p>
+          <a:p>
+            <a:r>
+              <a:rPr lang="zh-CN" dirty="0"/>
+              <a:t/>
+            </a:r>
+          </a:p>
+          <a:p>
+            <a:r>
+              <a:rPr lang="zh-CN" dirty="0"/>
+              <a:t>本节目标：掌握 range 的各种形式，能用推导式一行搞定筛选</a:t>
+            </a:r>
+          </a:p>
+          <a:p>
+            <a:r>
+              <a:rPr lang="zh-CN" dirty="0"/>
+              <a:t/>
+            </a:r>
+          </a:p>
+          <a:p>
+            <a:r>
+              <a:rPr lang="zh-CN" dirty="0"/>
+              <a:t>看不到懂的地方，回讲义对应小节读一遍，再回来对着这页复述一次——能讲出来才算真懂。</a:t>
+            </a:r>
+          </a:p>
+        </p:txBody>
+      </p:sp>
+    </p:spTree>
+  </p:cSld>
+  <p:clrMapOvr>
+    <a:masterClrMapping/>
+  </p:clrMapOvr>
+</p:notes>
+</file>
+
+<file path=ppt/notesSlides/notesSlide6.xml><?xml version="1.0" encoding="utf-8"?>
+<p:notes xmlns:a="http://schemas.openxmlformats.org/drawingml/2006/main" xmlns:p="http://schemas.openxmlformats.org/presentationml/2006/main" xmlns:r="http://schemas.openxmlformats.org/officeDocument/2006/relationships">
+  <p:cSld>
+    <p:spTree>
+      <p:nvGrpSpPr>
+        <p:cNvPr id="1" name=""/>
+        <p:cNvGrpSpPr/>
+        <p:nvPr/>
+      </p:nvGrpSpPr>
+      <p:grpSpPr>
+        <a:xfrm>
+          <a:off x="0" y="0"/>
+          <a:ext cx="0" cy="0"/>
+          <a:chOff x="0" y="0"/>
+          <a:chExt cx="0" cy="0"/>
+        </a:xfrm>
+      </p:grpSpPr>
+      <p:sp>
+        <p:nvSpPr>
+          <p:cNvPr id="2" name="讲课提示"/>
+          <p:cNvSpPr txBox="1"/>
+          <p:nvPr/>
+        </p:nvSpPr>
+        <p:spPr>
+          <a:xfrm>
+            <a:off x="457200" y="457200"/>
+            <a:ext cx="6858000" cy="4800600"/>
+          </a:xfrm>
+          <a:prstGeom prst="rect">
+            <a:avLst/>
+          </a:prstGeom>
+        </p:spPr>
+        <p:txBody>
+          <a:bodyPr wrap="square"/>
+          <a:lstStyle/>
+          <a:p>
+            <a:r>
+              <a:rPr lang="zh-CN" dirty="0"/>
+              <a:t>第 16 节 · 切片、元组与 PEP 8 排版</a:t>
+            </a:r>
+          </a:p>
+          <a:p>
+            <a:r>
+              <a:rPr lang="zh-CN" dirty="0"/>
+              <a:t>单元 3 · 操作列表 · W3</a:t>
+            </a:r>
+          </a:p>
+          <a:p>
+            <a:r>
+              <a:rPr lang="zh-CN" dirty="0"/>
+              <a:t/>
+            </a:r>
+          </a:p>
+          <a:p>
+            <a:r>
+              <a:rPr lang="zh-CN" dirty="0"/>
+              <a:t>学习目标：掌握切片三个参数与元组的不可变性，能按 PEP 8 排版</a:t>
+            </a:r>
+          </a:p>
+          <a:p>
+            <a:r>
+              <a:rPr lang="zh-CN" dirty="0"/>
+              <a:t/>
+            </a:r>
+          </a:p>
+          <a:p>
+            <a:r>
+              <a:rPr lang="zh-CN" dirty="0"/>
+              <a:t>课堂实操（40 分钟，不看答案）：</a:t>
+            </a:r>
+          </a:p>
+          <a:p>
+            <a:r>
+              <a:rPr lang="zh-CN" dirty="0"/>
+              <a:t>· 用切片取出字符串后 5 个字符</a:t>
+            </a:r>
+          </a:p>
+          <a:p>
+            <a:r>
+              <a:rPr lang="zh-CN" dirty="0"/>
+              <a:t>· 故意给元组赋值看报错</a:t>
+            </a:r>
+          </a:p>
+          <a:p>
+            <a:r>
+              <a:rPr lang="zh-CN" dirty="0"/>
+              <a:t>· 把一段故意写乱的代码排版规范</a:t>
+            </a:r>
+          </a:p>
+          <a:p>
+            <a:r>
+              <a:rPr lang="zh-CN" dirty="0"/>
+              <a:t/>
+            </a:r>
+          </a:p>
+          <a:p>
+            <a:r>
+              <a:rPr lang="zh-CN" dirty="0"/>
+              <a:t>课后作业：</a:t>
+            </a:r>
+          </a:p>
+          <a:p>
+            <a:r>
+              <a:rPr lang="zh-CN" dirty="0"/>
+              <a:t>· 完成题库 L1-5、L1-6</a:t>
+            </a:r>
+          </a:p>
+          <a:p>
+            <a:r>
+              <a:rPr lang="zh-CN" dirty="0"/>
+              <a:t/>
+            </a:r>
+          </a:p>
+          <a:p>
+            <a:r>
+              <a:rPr lang="zh-CN" dirty="0"/>
+              <a:t>节奏：讲 20 分钟 → 学员自己敲 40 分钟（不看答案）→ 对讲评自查 20 分钟 → 写作业 10 分钟。</a:t>
+            </a:r>
+          </a:p>
+        </p:txBody>
+      </p:sp>
+    </p:spTree>
+  </p:cSld>
+  <p:clrMapOvr>
+    <a:masterClrMapping/>
+  </p:clrMapOvr>
+</p:notes>
+</file>
+
+<file path=ppt/notesSlides/notesSlide7.xml><?xml version="1.0" encoding="utf-8"?>
+<p:notes xmlns:a="http://schemas.openxmlformats.org/drawingml/2006/main" xmlns:p="http://schemas.openxmlformats.org/presentationml/2006/main" xmlns:r="http://schemas.openxmlformats.org/officeDocument/2006/relationships">
+  <p:cSld>
+    <p:spTree>
+      <p:nvGrpSpPr>
+        <p:cNvPr id="1" name=""/>
+        <p:cNvGrpSpPr/>
+        <p:nvPr/>
+      </p:nvGrpSpPr>
+      <p:grpSpPr>
+        <a:xfrm>
+          <a:off x="0" y="0"/>
+          <a:ext cx="0" cy="0"/>
+          <a:chOff x="0" y="0"/>
+          <a:chExt cx="0" cy="0"/>
+        </a:xfrm>
+      </p:grpSpPr>
+      <p:sp>
+        <p:nvSpPr>
+          <p:cNvPr id="2" name="讲课提示"/>
+          <p:cNvSpPr txBox="1"/>
+          <p:nvPr/>
+        </p:nvSpPr>
+        <p:spPr>
+          <a:xfrm>
+            <a:off x="457200" y="457200"/>
+            <a:ext cx="6858000" cy="4800600"/>
+          </a:xfrm>
+          <a:prstGeom prst="rect">
+            <a:avLst/>
+          </a:prstGeom>
+        </p:spPr>
+        <p:txBody>
+          <a:bodyPr wrap="square"/>
+          <a:lstStyle/>
+          <a:p>
+            <a:r>
+              <a:rPr lang="zh-CN" dirty="0"/>
+              <a:t>第 16 节 · 核心知识点：切片、元组与 PEP 8 排版</a:t>
+            </a:r>
+          </a:p>
+          <a:p>
+            <a:r>
+              <a:rPr lang="zh-CN" dirty="0"/>
+              <a:t/>
+            </a:r>
+          </a:p>
+          <a:p>
+            <a:r>
+              <a:rPr lang="zh-CN" dirty="0"/>
+              <a:t>讲这一页时：先让学生说出上节课的结论，再逐块讲要点。</a:t>
+            </a:r>
+          </a:p>
+          <a:p>
+            <a:r>
+              <a:rPr lang="zh-CN" dirty="0"/>
+              <a:t>每讲完一块，问一句「这一步如果写错了，报错会长什么样？」——把错误提前讲。</a:t>
+            </a:r>
+          </a:p>
+          <a:p>
+            <a:r>
+              <a:rPr lang="zh-CN" dirty="0"/>
+              <a:t/>
+            </a:r>
+          </a:p>
+          <a:p>
+            <a:r>
+              <a:rPr lang="zh-CN" dirty="0"/>
+              <a:t>本节目标：掌握切片三个参数与元组的不可变性，能按 PEP 8 排版</a:t>
+            </a:r>
+          </a:p>
+          <a:p>
+            <a:r>
+              <a:rPr lang="zh-CN" dirty="0"/>
+              <a:t/>
+            </a:r>
+          </a:p>
+          <a:p>
+            <a:r>
+              <a:rPr lang="zh-CN" dirty="0"/>
+              <a:t>看不到懂的地方，回讲义对应小节读一遍，再回来对着这页复述一次——能讲出来才算真懂。</a:t>
+            </a:r>
+          </a:p>
+        </p:txBody>
+      </p:sp>
+    </p:spTree>
+  </p:cSld>
+  <p:clrMapOvr>
+    <a:masterClrMapping/>
+  </p:clrMapOvr>
+</p:notes>
+</file>
+
+<file path=ppt/notesSlides/notesSlide8.xml><?xml version="1.0" encoding="utf-8"?>
+<p:notes xmlns:a="http://schemas.openxmlformats.org/drawingml/2006/main" xmlns:p="http://schemas.openxmlformats.org/presentationml/2006/main" xmlns:r="http://schemas.openxmlformats.org/officeDocument/2006/relationships">
+  <p:cSld>
+    <p:spTree>
+      <p:nvGrpSpPr>
+        <p:cNvPr id="1" name=""/>
+        <p:cNvGrpSpPr/>
+        <p:nvPr/>
+      </p:nvGrpSpPr>
+      <p:grpSpPr>
+        <a:xfrm>
+          <a:off x="0" y="0"/>
+          <a:ext cx="0" cy="0"/>
+          <a:chOff x="0" y="0"/>
+          <a:chExt cx="0" cy="0"/>
+        </a:xfrm>
+      </p:grpSpPr>
+      <p:sp>
+        <p:nvSpPr>
+          <p:cNvPr id="2" name="讲课提示"/>
+          <p:cNvSpPr txBox="1"/>
+          <p:nvPr/>
+        </p:nvSpPr>
+        <p:spPr>
+          <a:xfrm>
+            <a:off x="457200" y="457200"/>
+            <a:ext cx="6858000" cy="4800600"/>
+          </a:xfrm>
+          <a:prstGeom prst="rect">
+            <a:avLst/>
+          </a:prstGeom>
+        </p:spPr>
+        <p:txBody>
+          <a:bodyPr wrap="square"/>
+          <a:lstStyle/>
+          <a:p>
+            <a:r>
+              <a:rPr lang="zh-CN" dirty="0"/>
+              <a:t>第 17 节 · 动手实战与答案讲评</a:t>
+            </a:r>
+          </a:p>
+          <a:p>
+            <a:r>
+              <a:rPr lang="zh-CN" dirty="0"/>
+              <a:t>单元 3 · 操作列表 · W3</a:t>
+            </a:r>
+          </a:p>
+          <a:p>
+            <a:r>
+              <a:rPr lang="zh-CN" dirty="0"/>
+              <a:t/>
+            </a:r>
+          </a:p>
+          <a:p>
+            <a:r>
+              <a:rPr lang="zh-CN" dirty="0"/>
+              <a:t>学习目标：独立完成单元 3 练习，巩固循环、推导式与元组</a:t>
+            </a:r>
+          </a:p>
+          <a:p>
+            <a:r>
+              <a:rPr lang="zh-CN" dirty="0"/>
+              <a:t/>
+            </a:r>
+          </a:p>
+          <a:p>
+            <a:r>
+              <a:rPr lang="zh-CN" dirty="0"/>
+              <a:t>课堂实操（40 分钟，不看答案）：</a:t>
+            </a:r>
+          </a:p>
+          <a:p>
+            <a:r>
+              <a:rPr lang="zh-CN" dirty="0"/>
+              <a:t>· 限时 30 分钟独立完成基础档</a:t>
+            </a:r>
+          </a:p>
+          <a:p>
+            <a:r>
+              <a:rPr lang="zh-CN" dirty="0"/>
+              <a:t>· 逐题对照答案讲评</a:t>
+            </a:r>
+          </a:p>
+          <a:p>
+            <a:r>
+              <a:rPr lang="zh-CN" dirty="0"/>
+              <a:t/>
+            </a:r>
+          </a:p>
+          <a:p>
+            <a:r>
+              <a:rPr lang="zh-CN" dirty="0"/>
+              <a:t>课后作业：</a:t>
+            </a:r>
+          </a:p>
+          <a:p>
+            <a:r>
+              <a:rPr lang="zh-CN" dirty="0"/>
+              <a:t>· ★ 完成动手项目 3.4–3.8 忘记密码清单</a:t>
+            </a:r>
+          </a:p>
+          <a:p>
+            <a:r>
+              <a:rPr lang="zh-CN" dirty="0"/>
+              <a:t>· 产出：忘记密码清单程序</a:t>
+            </a:r>
+          </a:p>
+          <a:p>
+            <a:r>
+              <a:rPr lang="zh-CN" dirty="0"/>
+              <a:t/>
+            </a:r>
+          </a:p>
+          <a:p>
+            <a:r>
+              <a:rPr lang="zh-CN" dirty="0"/>
+              <a:t>节奏：讲 20 分钟 → 学员自己敲 40 分钟（不看答案）→ 对讲评自查 20 分钟 → 写作业 10 分钟。</a:t>
+            </a:r>
+          </a:p>
+        </p:txBody>
+      </p:sp>
+    </p:spTree>
+  </p:cSld>
+  <p:clrMapOvr>
+    <a:masterClrMapping/>
+  </p:clrMapOvr>
+</p:notes>
+</file>
+
+<file path=ppt/notesSlides/notesSlide9.xml><?xml version="1.0" encoding="utf-8"?>
+<p:notes xmlns:a="http://schemas.openxmlformats.org/drawingml/2006/main" xmlns:p="http://schemas.openxmlformats.org/presentationml/2006/main" xmlns:r="http://schemas.openxmlformats.org/officeDocument/2006/relationships">
+  <p:cSld>
+    <p:spTree>
+      <p:nvGrpSpPr>
+        <p:cNvPr id="1" name=""/>
+        <p:cNvGrpSpPr/>
+        <p:nvPr/>
+      </p:nvGrpSpPr>
+      <p:grpSpPr>
+        <a:xfrm>
+          <a:off x="0" y="0"/>
+          <a:ext cx="0" cy="0"/>
+          <a:chOff x="0" y="0"/>
+          <a:chExt cx="0" cy="0"/>
+        </a:xfrm>
+      </p:grpSpPr>
+      <p:sp>
+        <p:nvSpPr>
+          <p:cNvPr id="2" name="讲课提示"/>
+          <p:cNvSpPr txBox="1"/>
+          <p:nvPr/>
+        </p:nvSpPr>
+        <p:spPr>
+          <a:xfrm>
+            <a:off x="457200" y="457200"/>
+            <a:ext cx="6858000" cy="4800600"/>
+          </a:xfrm>
+          <a:prstGeom prst="rect">
+            <a:avLst/>
+          </a:prstGeom>
+        </p:spPr>
+        <p:txBody>
+          <a:bodyPr wrap="square"/>
+          <a:lstStyle/>
+          <a:p>
+            <a:r>
+              <a:rPr lang="zh-CN" dirty="0"/>
+              <a:t>第 17 节 · 核心知识点：动手实战与答案讲评</a:t>
+            </a:r>
+          </a:p>
+          <a:p>
+            <a:r>
+              <a:rPr lang="zh-CN" dirty="0"/>
+              <a:t/>
+            </a:r>
+          </a:p>
+          <a:p>
+            <a:r>
+              <a:rPr lang="zh-CN" dirty="0"/>
+              <a:t>讲这一页时：先让学生说出上节课的结论，再逐块讲要点。</a:t>
+            </a:r>
+          </a:p>
+          <a:p>
+            <a:r>
+              <a:rPr lang="zh-CN" dirty="0"/>
+              <a:t>每讲完一块，问一句「这一步如果写错了，报错会长什么样？」——把错误提前讲。</a:t>
+            </a:r>
+          </a:p>
+          <a:p>
+            <a:r>
+              <a:rPr lang="zh-CN" dirty="0"/>
+              <a:t/>
+            </a:r>
+          </a:p>
+          <a:p>
+            <a:r>
+              <a:rPr lang="zh-CN" dirty="0"/>
+              <a:t>本节目标：独立完成单元 3 练习，巩固循环、推导式与元组</a:t>
+            </a:r>
+          </a:p>
+          <a:p>
+            <a:r>
+              <a:rPr lang="zh-CN" dirty="0"/>
+              <a:t/>
+            </a:r>
+          </a:p>
+          <a:p>
+            <a:r>
+              <a:rPr lang="zh-CN" dirty="0"/>
+              <a:t>看不到懂的地方，回讲义对应小节读一遍，再回来对着这页复述一次——能讲出来才算真懂。</a:t>
+            </a:r>
+          </a:p>
+        </p:txBody>
+      </p:sp>
+    </p:spTree>
+  </p:cSld>
+  <p:clrMapOvr>
+    <a:masterClrMapping/>
+  </p:clrMapOvr>
+</p:notes>
 </file>
 
 <file path=ppt/slideLayouts/slideLayout1.xml><?xml version="1.0" encoding="utf-8"?>
